--- a/FinGuard_AI_CA3_Presentation.pptx
+++ b/FinGuard_AI_CA3_Presentation.pptx
@@ -15,7 +15,7 @@
     <p:sldId id="263" r:id="rId14"/>
     <p:sldId id="264" r:id="rId15"/>
   </p:sldIdLst>
-  <p:sldSz cx="12191695" cy="6858000" type="screen4x3"/>
+  <p:sldSz cx="9144000" cy="6858000" type="screen4x3"/>
   <p:notesSz cx="6858000" cy="9144000"/>
   <p:defaultTextStyle>
     <a:defPPr>
@@ -3092,7 +3092,7 @@
     <p:bg>
       <p:bgPr>
         <a:solidFill>
-          <a:srgbClr val="122340"/>
+          <a:srgbClr val="FDF6E3"/>
         </a:solidFill>
         <a:effectLst/>
       </p:bgPr>
@@ -3112,17 +3112,17 @@
         </p:nvSpPr>
         <p:spPr>
           <a:xfrm>
-            <a:off x="0" y="0"/>
-            <a:ext cx="12191695" cy="594360"/>
-          </a:xfrm>
-          <a:prstGeom prst="rect">
-            <a:avLst/>
-          </a:prstGeom>
-          <a:solidFill>
-            <a:srgbClr val="2862A8"/>
-          </a:solidFill>
-          <a:ln>
-            <a:noFill/>
+            <a:off x="164592" y="164592"/>
+            <a:ext cx="8814816" cy="6528816"/>
+          </a:xfrm>
+          <a:prstGeom prst="rect">
+            <a:avLst/>
+          </a:prstGeom>
+          <a:noFill/>
+          <a:ln w="44450">
+            <a:solidFill>
+              <a:srgbClr val="D95F1A"/>
+            </a:solidFill>
           </a:ln>
         </p:spPr>
         <p:style>
@@ -3149,14 +3149,57 @@
       </p:sp>
       <p:sp>
         <p:nvSpPr>
-          <p:cNvPr id="3" name="TextBox 2"/>
+          <p:cNvPr id="3" name="Rectangle 2"/>
+          <p:cNvSpPr/>
+          <p:nvPr/>
+        </p:nvSpPr>
+        <p:spPr>
+          <a:xfrm>
+            <a:off x="347472" y="347472"/>
+            <a:ext cx="8449056" cy="6163056"/>
+          </a:xfrm>
+          <a:prstGeom prst="rect">
+            <a:avLst/>
+          </a:prstGeom>
+          <a:noFill/>
+          <a:ln w="15240">
+            <a:solidFill>
+              <a:srgbClr val="C29A3C"/>
+            </a:solidFill>
+          </a:ln>
+        </p:spPr>
+        <p:style>
+          <a:lnRef idx="1">
+            <a:schemeClr val="accent1"/>
+          </a:lnRef>
+          <a:fillRef idx="3">
+            <a:schemeClr val="accent1"/>
+          </a:fillRef>
+          <a:effectRef idx="2">
+            <a:schemeClr val="accent1"/>
+          </a:effectRef>
+          <a:fontRef idx="minor">
+            <a:schemeClr val="lt1"/>
+          </a:fontRef>
+        </p:style>
+        <p:txBody>
+          <a:bodyPr rtlCol="0" anchor="ctr"/>
+          <a:lstStyle/>
+          <a:p>
+            <a:pPr algn="ctr"/>
+          </a:p>
+        </p:txBody>
+      </p:sp>
+      <p:sp>
+        <p:nvSpPr>
+          <p:cNvPr id="4" name="TextBox 3"/>
           <p:cNvSpPr txBox="1"/>
           <p:nvPr/>
         </p:nvSpPr>
         <p:spPr>
           <a:xfrm>
-            <a:off x="640080" y="1280160"/>
-            <a:ext cx="10972800" cy="914400"/>
+            <a:off x="914400" y="1417320"/>
+            <a:ext cx="7315200" cy="1371600"/>
           </a:xfrm>
           <a:prstGeom prst="rect">
             <a:avLst/>
@@ -3164,19 +3207,19 @@
           <a:noFill/>
         </p:spPr>
         <p:txBody>
-          <a:bodyPr wrap="none">
+          <a:bodyPr wrap="square">
             <a:spAutoFit/>
           </a:bodyPr>
           <a:lstStyle/>
           <a:p>
-            <a:pPr algn="l">
-              <a:defRPr sz="2400" b="1">
-                <a:solidFill>
-                  <a:srgbClr val="FFFFFF"/>
-                </a:solidFill>
-              </a:defRPr>
-            </a:pPr>
-            <a:r>
+            <a:pPr algn="ctr"/>
+            <a:r>
+              <a:rPr sz="5800" b="1" i="0">
+                <a:solidFill>
+                  <a:srgbClr val="D95F1A"/>
+                </a:solidFill>
+                <a:latin typeface="Caveat"/>
+              </a:rPr>
               <a:t>FinGuard AI</a:t>
             </a:r>
           </a:p>
@@ -3184,14 +3227,14 @@
       </p:sp>
       <p:sp>
         <p:nvSpPr>
-          <p:cNvPr id="4" name="TextBox 3"/>
+          <p:cNvPr id="5" name="TextBox 4"/>
           <p:cNvSpPr txBox="1"/>
           <p:nvPr/>
         </p:nvSpPr>
         <p:spPr>
           <a:xfrm>
-            <a:off x="731520" y="2286000"/>
-            <a:ext cx="9601200" cy="914400"/>
+            <a:off x="914400" y="2743200"/>
+            <a:ext cx="7315200" cy="685800"/>
           </a:xfrm>
           <a:prstGeom prst="rect">
             <a:avLst/>
@@ -3199,38 +3242,77 @@
           <a:noFill/>
         </p:spPr>
         <p:txBody>
-          <a:bodyPr wrap="none">
+          <a:bodyPr wrap="square">
             <a:spAutoFit/>
           </a:bodyPr>
           <a:lstStyle/>
           <a:p>
-            <a:pPr algn="l">
-              <a:defRPr sz="1600">
-                <a:solidFill>
-                  <a:srgbClr val="DCE6F5"/>
-                </a:solidFill>
-              </a:defRPr>
-            </a:pPr>
-            <a:r>
-              <a:t>CA-3 Agentic AI Proof of Concept</a:t>
-            </a:r>
-            <a:br/>
-            <a:r>
-              <a:t>Banking &amp; Finance: Suspicious Transaction Review</a:t>
-            </a:r>
-          </a:p>
-        </p:txBody>
-      </p:sp>
-      <p:sp>
-        <p:nvSpPr>
-          <p:cNvPr id="5" name="TextBox 4"/>
+            <a:pPr algn="ctr"/>
+            <a:r>
+              <a:rPr sz="2700" b="0" i="0">
+                <a:solidFill>
+                  <a:srgbClr val="1C170E"/>
+                </a:solidFill>
+                <a:latin typeface="Caveat"/>
+              </a:rPr>
+              <a:t>Multi-Agent Fraud Risk Detection</a:t>
+            </a:r>
+          </a:p>
+        </p:txBody>
+      </p:sp>
+      <p:sp>
+        <p:nvSpPr>
+          <p:cNvPr id="6" name="Rectangle 5"/>
+          <p:cNvSpPr/>
+          <p:nvPr/>
+        </p:nvSpPr>
+        <p:spPr>
+          <a:xfrm>
+            <a:off x="2286000" y="3566160"/>
+            <a:ext cx="4572000" cy="36576"/>
+          </a:xfrm>
+          <a:prstGeom prst="rect">
+            <a:avLst/>
+          </a:prstGeom>
+          <a:solidFill>
+            <a:srgbClr val="C29A3C"/>
+          </a:solidFill>
+          <a:ln w="19050">
+            <a:noFill/>
+          </a:ln>
+        </p:spPr>
+        <p:style>
+          <a:lnRef idx="1">
+            <a:schemeClr val="accent1"/>
+          </a:lnRef>
+          <a:fillRef idx="3">
+            <a:schemeClr val="accent1"/>
+          </a:fillRef>
+          <a:effectRef idx="2">
+            <a:schemeClr val="accent1"/>
+          </a:effectRef>
+          <a:fontRef idx="minor">
+            <a:schemeClr val="lt1"/>
+          </a:fontRef>
+        </p:style>
+        <p:txBody>
+          <a:bodyPr rtlCol="0" anchor="ctr"/>
+          <a:lstStyle/>
+          <a:p>
+            <a:pPr algn="ctr"/>
+          </a:p>
+        </p:txBody>
+      </p:sp>
+      <p:sp>
+        <p:nvSpPr>
+          <p:cNvPr id="7" name="TextBox 6"/>
           <p:cNvSpPr txBox="1"/>
           <p:nvPr/>
         </p:nvSpPr>
         <p:spPr>
           <a:xfrm>
-            <a:off x="731520" y="4572000"/>
-            <a:ext cx="3291840" cy="822960"/>
+            <a:off x="914400" y="3703320"/>
+            <a:ext cx="7315200" cy="502920"/>
           </a:xfrm>
           <a:prstGeom prst="rect">
             <a:avLst/>
@@ -3238,34 +3320,34 @@
           <a:noFill/>
         </p:spPr>
         <p:txBody>
-          <a:bodyPr wrap="none">
+          <a:bodyPr wrap="square">
             <a:spAutoFit/>
           </a:bodyPr>
           <a:lstStyle/>
           <a:p>
-            <a:pPr>
-              <a:defRPr sz="1800" b="1">
-                <a:solidFill>
-                  <a:srgbClr val="FFFFFF"/>
-                </a:solidFill>
-              </a:defRPr>
-            </a:pPr>
-            <a:r>
-              <a:t>CA-3 • Agentic AI PoC</a:t>
-            </a:r>
-          </a:p>
-        </p:txBody>
-      </p:sp>
-      <p:sp>
-        <p:nvSpPr>
-          <p:cNvPr id="6" name="TextBox 5"/>
+            <a:pPr algn="ctr"/>
+            <a:r>
+              <a:rPr sz="1300" b="0" i="1">
+                <a:solidFill>
+                  <a:srgbClr val="1B4F8A"/>
+                </a:solidFill>
+                <a:latin typeface="Segoe UI"/>
+              </a:rPr>
+              <a:t>500 transactions  |  4-agent pipeline  |  100% Critic pass rate</a:t>
+            </a:r>
+          </a:p>
+        </p:txBody>
+      </p:sp>
+      <p:sp>
+        <p:nvSpPr>
+          <p:cNvPr id="8" name="TextBox 7"/>
           <p:cNvSpPr txBox="1"/>
           <p:nvPr/>
         </p:nvSpPr>
         <p:spPr>
           <a:xfrm>
-            <a:off x="731520" y="5760720"/>
-            <a:ext cx="5029200" cy="457200"/>
+            <a:off x="914400" y="4389120"/>
+            <a:ext cx="7315200" cy="411480"/>
           </a:xfrm>
           <a:prstGeom prst="rect">
             <a:avLst/>
@@ -3273,20 +3355,195 @@
           <a:noFill/>
         </p:spPr>
         <p:txBody>
-          <a:bodyPr wrap="none">
+          <a:bodyPr wrap="square">
             <a:spAutoFit/>
           </a:bodyPr>
           <a:lstStyle/>
           <a:p>
-            <a:pPr>
-              <a:defRPr sz="1100">
-                <a:solidFill>
-                  <a:srgbClr val="C8D2DC"/>
-                </a:solidFill>
-              </a:defRPr>
-            </a:pPr>
-            <a:r>
-              <a:t>FinGuard AI | Banking &amp; Finance Domain</a:t>
+            <a:pPr algn="ctr"/>
+            <a:r>
+              <a:rPr sz="1200" b="0" i="0">
+                <a:solidFill>
+                  <a:srgbClr val="C29A3C"/>
+                </a:solidFill>
+                <a:latin typeface="Segoe UI"/>
+              </a:rPr>
+              <a:t>github.com/Nirrmam2211/finguard-ai</a:t>
+            </a:r>
+          </a:p>
+        </p:txBody>
+      </p:sp>
+      <p:sp>
+        <p:nvSpPr>
+          <p:cNvPr id="9" name="TextBox 8"/>
+          <p:cNvSpPr txBox="1"/>
+          <p:nvPr/>
+        </p:nvSpPr>
+        <p:spPr>
+          <a:xfrm>
+            <a:off x="914400" y="5943600"/>
+            <a:ext cx="7315200" cy="411480"/>
+          </a:xfrm>
+          <a:prstGeom prst="rect">
+            <a:avLst/>
+          </a:prstGeom>
+          <a:noFill/>
+        </p:spPr>
+        <p:txBody>
+          <a:bodyPr wrap="square">
+            <a:spAutoFit/>
+          </a:bodyPr>
+          <a:lstStyle/>
+          <a:p>
+            <a:pPr algn="ctr"/>
+            <a:r>
+              <a:rPr sz="1200" b="0" i="0">
+                <a:solidFill>
+                  <a:srgbClr val="1C170E"/>
+                </a:solidFill>
+                <a:latin typeface="Segoe UI"/>
+              </a:rPr>
+              <a:t>Symbiosis Institute of Technology  /  SEM-5 Flexi Project</a:t>
+            </a:r>
+          </a:p>
+        </p:txBody>
+      </p:sp>
+      <p:sp>
+        <p:nvSpPr>
+          <p:cNvPr id="10" name="TextBox 9"/>
+          <p:cNvSpPr txBox="1"/>
+          <p:nvPr/>
+        </p:nvSpPr>
+        <p:spPr>
+          <a:xfrm>
+            <a:off x="228600" y="201168"/>
+            <a:ext cx="274320" cy="274320"/>
+          </a:xfrm>
+          <a:prstGeom prst="rect">
+            <a:avLst/>
+          </a:prstGeom>
+          <a:noFill/>
+        </p:spPr>
+        <p:txBody>
+          <a:bodyPr wrap="square">
+            <a:spAutoFit/>
+          </a:bodyPr>
+          <a:lstStyle/>
+          <a:p>
+            <a:pPr algn="ctr"/>
+            <a:r>
+              <a:rPr sz="1400" b="0" i="0">
+                <a:solidFill>
+                  <a:srgbClr val="C29A3C"/>
+                </a:solidFill>
+                <a:latin typeface="Segoe UI"/>
+              </a:rPr>
+              <a:t>+</a:t>
+            </a:r>
+          </a:p>
+        </p:txBody>
+      </p:sp>
+      <p:sp>
+        <p:nvSpPr>
+          <p:cNvPr id="11" name="TextBox 10"/>
+          <p:cNvSpPr txBox="1"/>
+          <p:nvPr/>
+        </p:nvSpPr>
+        <p:spPr>
+          <a:xfrm>
+            <a:off x="8503920" y="201168"/>
+            <a:ext cx="274320" cy="274320"/>
+          </a:xfrm>
+          <a:prstGeom prst="rect">
+            <a:avLst/>
+          </a:prstGeom>
+          <a:noFill/>
+        </p:spPr>
+        <p:txBody>
+          <a:bodyPr wrap="square">
+            <a:spAutoFit/>
+          </a:bodyPr>
+          <a:lstStyle/>
+          <a:p>
+            <a:pPr algn="ctr"/>
+            <a:r>
+              <a:rPr sz="1400" b="0" i="0">
+                <a:solidFill>
+                  <a:srgbClr val="C29A3C"/>
+                </a:solidFill>
+                <a:latin typeface="Segoe UI"/>
+              </a:rPr>
+              <a:t>+</a:t>
+            </a:r>
+          </a:p>
+        </p:txBody>
+      </p:sp>
+      <p:sp>
+        <p:nvSpPr>
+          <p:cNvPr id="12" name="TextBox 11"/>
+          <p:cNvSpPr txBox="1"/>
+          <p:nvPr/>
+        </p:nvSpPr>
+        <p:spPr>
+          <a:xfrm>
+            <a:off x="228600" y="6446520"/>
+            <a:ext cx="274320" cy="274320"/>
+          </a:xfrm>
+          <a:prstGeom prst="rect">
+            <a:avLst/>
+          </a:prstGeom>
+          <a:noFill/>
+        </p:spPr>
+        <p:txBody>
+          <a:bodyPr wrap="square">
+            <a:spAutoFit/>
+          </a:bodyPr>
+          <a:lstStyle/>
+          <a:p>
+            <a:pPr algn="ctr"/>
+            <a:r>
+              <a:rPr sz="1400" b="0" i="0">
+                <a:solidFill>
+                  <a:srgbClr val="C29A3C"/>
+                </a:solidFill>
+                <a:latin typeface="Segoe UI"/>
+              </a:rPr>
+              <a:t>+</a:t>
+            </a:r>
+          </a:p>
+        </p:txBody>
+      </p:sp>
+      <p:sp>
+        <p:nvSpPr>
+          <p:cNvPr id="13" name="TextBox 12"/>
+          <p:cNvSpPr txBox="1"/>
+          <p:nvPr/>
+        </p:nvSpPr>
+        <p:spPr>
+          <a:xfrm>
+            <a:off x="8503920" y="6446520"/>
+            <a:ext cx="274320" cy="274320"/>
+          </a:xfrm>
+          <a:prstGeom prst="rect">
+            <a:avLst/>
+          </a:prstGeom>
+          <a:noFill/>
+        </p:spPr>
+        <p:txBody>
+          <a:bodyPr wrap="square">
+            <a:spAutoFit/>
+          </a:bodyPr>
+          <a:lstStyle/>
+          <a:p>
+            <a:pPr algn="ctr"/>
+            <a:r>
+              <a:rPr sz="1400" b="0" i="0">
+                <a:solidFill>
+                  <a:srgbClr val="C29A3C"/>
+                </a:solidFill>
+                <a:latin typeface="Segoe UI"/>
+              </a:rPr>
+              <a:t>+</a:t>
             </a:r>
           </a:p>
         </p:txBody>
@@ -3305,7 +3562,7 @@
     <p:bg>
       <p:bgPr>
         <a:solidFill>
-          <a:srgbClr val="FFFFFF"/>
+          <a:srgbClr val="FDF6E3"/>
         </a:solidFill>
         <a:effectLst/>
       </p:bgPr>
@@ -3326,15 +3583,15 @@
         <p:spPr>
           <a:xfrm>
             <a:off x="0" y="0"/>
-            <a:ext cx="12191695" cy="411480"/>
+            <a:ext cx="9144000" cy="960120"/>
           </a:xfrm>
           <a:prstGeom prst="rect">
             <a:avLst/>
           </a:prstGeom>
           <a:solidFill>
-            <a:srgbClr val="2862A8"/>
+            <a:srgbClr val="1C170E"/>
           </a:solidFill>
-          <a:ln>
+          <a:ln w="19050">
             <a:noFill/>
           </a:ln>
         </p:spPr>
@@ -3368,43 +3625,8 @@
         </p:nvSpPr>
         <p:spPr>
           <a:xfrm>
-            <a:off x="640080" y="685800"/>
-            <a:ext cx="9601200" cy="640080"/>
-          </a:xfrm>
-          <a:prstGeom prst="rect">
-            <a:avLst/>
-          </a:prstGeom>
-          <a:noFill/>
-        </p:spPr>
-        <p:txBody>
-          <a:bodyPr wrap="none">
-            <a:spAutoFit/>
-          </a:bodyPr>
-          <a:lstStyle/>
-          <a:p>
-            <a:pPr>
-              <a:defRPr sz="2400" b="1">
-                <a:solidFill>
-                  <a:srgbClr val="122340"/>
-                </a:solidFill>
-              </a:defRPr>
-            </a:pPr>
-            <a:r>
-              <a:t>Problem Statement</a:t>
-            </a:r>
-          </a:p>
-        </p:txBody>
-      </p:sp>
-      <p:sp>
-        <p:nvSpPr>
-          <p:cNvPr id="4" name="TextBox 3"/>
-          <p:cNvSpPr txBox="1"/>
-          <p:nvPr/>
-        </p:nvSpPr>
-        <p:spPr>
-          <a:xfrm>
-            <a:off x="731520" y="1463040"/>
-            <a:ext cx="10241280" cy="4389120"/>
+            <a:off x="256032" y="91440"/>
+            <a:ext cx="8686800" cy="777240"/>
           </a:xfrm>
           <a:prstGeom prst="rect">
             <a:avLst/>
@@ -3417,63 +3639,781 @@
           </a:bodyPr>
           <a:lstStyle/>
           <a:p>
-            <a:pPr>
-              <a:spcAft>
-                <a:spcPts val="1000"/>
-              </a:spcAft>
-              <a:defRPr sz="2000">
-                <a:solidFill>
-                  <a:srgbClr val="1E1E1E"/>
-                </a:solidFill>
-              </a:defRPr>
-            </a:pPr>
-            <a:r>
-              <a:t>Financial institutions receive high transaction volumes every day.</a:t>
-            </a:r>
-          </a:p>
-          <a:p>
-            <a:pPr>
-              <a:spcAft>
-                <a:spcPts val="1000"/>
-              </a:spcAft>
-              <a:defRPr sz="2000">
-                <a:solidFill>
-                  <a:srgbClr val="1E1E1E"/>
-                </a:solidFill>
-              </a:defRPr>
-            </a:pPr>
-            <a:r>
-              <a:t>Analysts currently review suspicious activity manually using multiple checks and fragmented tools.</a:t>
-            </a:r>
-          </a:p>
-          <a:p>
-            <a:pPr>
-              <a:spcAft>
-                <a:spcPts val="1000"/>
-              </a:spcAft>
-              <a:defRPr sz="2000">
-                <a:solidFill>
-                  <a:srgbClr val="1E1E1E"/>
-                </a:solidFill>
-              </a:defRPr>
-            </a:pPr>
-            <a:r>
-              <a:t>The process is slow, inconsistent, and difficult to explain or audit.</a:t>
-            </a:r>
-          </a:p>
-          <a:p>
-            <a:pPr>
-              <a:spcAft>
-                <a:spcPts val="1000"/>
-              </a:spcAft>
-              <a:defRPr sz="2000">
-                <a:solidFill>
-                  <a:srgbClr val="1E1E1E"/>
-                </a:solidFill>
-              </a:defRPr>
-            </a:pPr>
-            <a:r>
-              <a:t>A better workflow is needed for explainable alert triage and human review support.</a:t>
+            <a:pPr algn="l"/>
+            <a:r>
+              <a:rPr sz="3000" b="1" i="0">
+                <a:solidFill>
+                  <a:srgbClr val="FDF6E3"/>
+                </a:solidFill>
+                <a:latin typeface="Caveat"/>
+              </a:rPr>
+              <a:t>Introduction</a:t>
+            </a:r>
+          </a:p>
+        </p:txBody>
+      </p:sp>
+      <p:sp>
+        <p:nvSpPr>
+          <p:cNvPr id="4" name="Rectangle 3"/>
+          <p:cNvSpPr/>
+          <p:nvPr/>
+        </p:nvSpPr>
+        <p:spPr>
+          <a:xfrm>
+            <a:off x="228600" y="1097280"/>
+            <a:ext cx="4114800" cy="5212080"/>
+          </a:xfrm>
+          <a:prstGeom prst="rect">
+            <a:avLst/>
+          </a:prstGeom>
+          <a:solidFill>
+            <a:srgbClr val="FBEED3"/>
+          </a:solidFill>
+          <a:ln w="22860">
+            <a:solidFill>
+              <a:srgbClr val="C29A3C"/>
+            </a:solidFill>
+          </a:ln>
+        </p:spPr>
+        <p:style>
+          <a:lnRef idx="1">
+            <a:schemeClr val="accent1"/>
+          </a:lnRef>
+          <a:fillRef idx="3">
+            <a:schemeClr val="accent1"/>
+          </a:fillRef>
+          <a:effectRef idx="2">
+            <a:schemeClr val="accent1"/>
+          </a:effectRef>
+          <a:fontRef idx="minor">
+            <a:schemeClr val="lt1"/>
+          </a:fontRef>
+        </p:style>
+        <p:txBody>
+          <a:bodyPr rtlCol="0" anchor="ctr"/>
+          <a:lstStyle/>
+          <a:p>
+            <a:pPr algn="ctr"/>
+          </a:p>
+        </p:txBody>
+      </p:sp>
+      <p:sp>
+        <p:nvSpPr>
+          <p:cNvPr id="5" name="TextBox 4"/>
+          <p:cNvSpPr txBox="1"/>
+          <p:nvPr/>
+        </p:nvSpPr>
+        <p:spPr>
+          <a:xfrm>
+            <a:off x="411480" y="1188720"/>
+            <a:ext cx="3749039" cy="457200"/>
+          </a:xfrm>
+          <a:prstGeom prst="rect">
+            <a:avLst/>
+          </a:prstGeom>
+          <a:noFill/>
+        </p:spPr>
+        <p:txBody>
+          <a:bodyPr wrap="square">
+            <a:spAutoFit/>
+          </a:bodyPr>
+          <a:lstStyle/>
+          <a:p>
+            <a:pPr algn="l"/>
+            <a:r>
+              <a:rPr sz="1900" b="1" i="0">
+                <a:solidFill>
+                  <a:srgbClr val="D95F1A"/>
+                </a:solidFill>
+                <a:latin typeface="Caveat"/>
+              </a:rPr>
+              <a:t>What it is</a:t>
+            </a:r>
+          </a:p>
+        </p:txBody>
+      </p:sp>
+      <p:sp>
+        <p:nvSpPr>
+          <p:cNvPr id="6" name="TextBox 5"/>
+          <p:cNvSpPr txBox="1"/>
+          <p:nvPr/>
+        </p:nvSpPr>
+        <p:spPr>
+          <a:xfrm>
+            <a:off x="411480" y="1691640"/>
+            <a:ext cx="3840480" cy="4434840"/>
+          </a:xfrm>
+          <a:prstGeom prst="rect">
+            <a:avLst/>
+          </a:prstGeom>
+          <a:noFill/>
+        </p:spPr>
+        <p:txBody>
+          <a:bodyPr wrap="square">
+            <a:spAutoFit/>
+          </a:bodyPr>
+          <a:lstStyle/>
+          <a:p>
+            <a:pPr>
+              <a:spcBef>
+                <a:spcPts val="500"/>
+              </a:spcBef>
+            </a:pPr>
+            <a:r>
+              <a:rPr sz="1250" b="0" i="0">
+                <a:solidFill>
+                  <a:srgbClr val="1C170E"/>
+                </a:solidFill>
+                <a:latin typeface="Segoe UI"/>
+              </a:rPr>
+              <a:t>FinGuard AI chains four autonomous agents</a:t>
+            </a:r>
+          </a:p>
+          <a:p>
+            <a:pPr>
+              <a:spcBef>
+                <a:spcPts val="500"/>
+              </a:spcBef>
+            </a:pPr>
+            <a:r>
+              <a:rPr sz="1250" b="0" i="0">
+                <a:solidFill>
+                  <a:srgbClr val="1C170E"/>
+                </a:solidFill>
+                <a:latin typeface="Segoe UI"/>
+              </a:rPr>
+              <a:t>to investigate a single financial transaction</a:t>
+            </a:r>
+          </a:p>
+          <a:p>
+            <a:pPr>
+              <a:spcBef>
+                <a:spcPts val="500"/>
+              </a:spcBef>
+            </a:pPr>
+            <a:r>
+              <a:rPr sz="1250" b="0" i="0">
+                <a:solidFill>
+                  <a:srgbClr val="1C170E"/>
+                </a:solidFill>
+                <a:latin typeface="Segoe UI"/>
+              </a:rPr>
+              <a:t>and produce an explainable risk score.</a:t>
+            </a:r>
+          </a:p>
+          <a:p>
+            <a:pPr>
+              <a:spcBef>
+                <a:spcPts val="500"/>
+              </a:spcBef>
+            </a:pPr>
+            <a:r>
+              <a:rPr sz="1250" b="0" i="0">
+                <a:solidFill>
+                  <a:srgbClr val="1C170E"/>
+                </a:solidFill>
+                <a:latin typeface="Segoe UI"/>
+              </a:rPr>
+              <a:t/>
+            </a:r>
+          </a:p>
+          <a:p>
+            <a:pPr>
+              <a:spcBef>
+                <a:spcPts val="500"/>
+              </a:spcBef>
+            </a:pPr>
+            <a:r>
+              <a:rPr sz="1250" b="0" i="0">
+                <a:solidFill>
+                  <a:srgbClr val="1C170E"/>
+                </a:solidFill>
+                <a:latin typeface="Segoe UI"/>
+              </a:rPr>
+              <a:t>Planner checks that all required fields are</a:t>
+            </a:r>
+          </a:p>
+          <a:p>
+            <a:pPr>
+              <a:spcBef>
+                <a:spcPts val="500"/>
+              </a:spcBef>
+            </a:pPr>
+            <a:r>
+              <a:rPr sz="1250" b="0" i="0">
+                <a:solidFill>
+                  <a:srgbClr val="1C170E"/>
+                </a:solidFill>
+                <a:latin typeface="Segoe UI"/>
+              </a:rPr>
+              <a:t>present and creates the investigation task list.</a:t>
+            </a:r>
+          </a:p>
+          <a:p>
+            <a:pPr>
+              <a:spcBef>
+                <a:spcPts val="500"/>
+              </a:spcBef>
+            </a:pPr>
+            <a:r>
+              <a:rPr sz="1250" b="0" i="0">
+                <a:solidFill>
+                  <a:srgbClr val="1C170E"/>
+                </a:solidFill>
+                <a:latin typeface="Segoe UI"/>
+              </a:rPr>
+              <a:t/>
+            </a:r>
+          </a:p>
+          <a:p>
+            <a:pPr>
+              <a:spcBef>
+                <a:spcPts val="500"/>
+              </a:spcBef>
+            </a:pPr>
+            <a:r>
+              <a:rPr sz="1250" b="0" i="0">
+                <a:solidFill>
+                  <a:srgbClr val="1C170E"/>
+                </a:solidFill>
+                <a:latin typeface="Segoe UI"/>
+              </a:rPr>
+              <a:t>Research collects transaction context and</a:t>
+            </a:r>
+          </a:p>
+          <a:p>
+            <a:pPr>
+              <a:spcBef>
+                <a:spcPts val="500"/>
+              </a:spcBef>
+            </a:pPr>
+            <a:r>
+              <a:rPr sz="1250" b="0" i="0">
+                <a:solidFill>
+                  <a:srgbClr val="1C170E"/>
+                </a:solidFill>
+                <a:latin typeface="Segoe UI"/>
+              </a:rPr>
+              <a:t>flags relevant behavioural patterns.</a:t>
+            </a:r>
+          </a:p>
+          <a:p>
+            <a:pPr>
+              <a:spcBef>
+                <a:spcPts val="500"/>
+              </a:spcBef>
+            </a:pPr>
+            <a:r>
+              <a:rPr sz="1250" b="0" i="0">
+                <a:solidFill>
+                  <a:srgbClr val="1C170E"/>
+                </a:solidFill>
+                <a:latin typeface="Segoe UI"/>
+              </a:rPr>
+              <a:t/>
+            </a:r>
+          </a:p>
+          <a:p>
+            <a:pPr>
+              <a:spcBef>
+                <a:spcPts val="500"/>
+              </a:spcBef>
+            </a:pPr>
+            <a:r>
+              <a:rPr sz="1250" b="0" i="0">
+                <a:solidFill>
+                  <a:srgbClr val="1C170E"/>
+                </a:solidFill>
+                <a:latin typeface="Segoe UI"/>
+              </a:rPr>
+              <a:t>Executor calls the Python risk engine and</a:t>
+            </a:r>
+          </a:p>
+          <a:p>
+            <a:pPr>
+              <a:spcBef>
+                <a:spcPts val="500"/>
+              </a:spcBef>
+            </a:pPr>
+            <a:r>
+              <a:rPr sz="1250" b="0" i="0">
+                <a:solidFill>
+                  <a:srgbClr val="1C170E"/>
+                </a:solidFill>
+                <a:latin typeface="Segoe UI"/>
+              </a:rPr>
+              <a:t>scores the transaction against five rules.</a:t>
+            </a:r>
+          </a:p>
+          <a:p>
+            <a:pPr>
+              <a:spcBef>
+                <a:spcPts val="500"/>
+              </a:spcBef>
+            </a:pPr>
+            <a:r>
+              <a:rPr sz="1250" b="0" i="0">
+                <a:solidFill>
+                  <a:srgbClr val="1C170E"/>
+                </a:solidFill>
+                <a:latin typeface="Segoe UI"/>
+              </a:rPr>
+              <a:t/>
+            </a:r>
+          </a:p>
+          <a:p>
+            <a:pPr>
+              <a:spcBef>
+                <a:spcPts val="500"/>
+              </a:spcBef>
+            </a:pPr>
+            <a:r>
+              <a:rPr sz="1250" b="0" i="0">
+                <a:solidFill>
+                  <a:srgbClr val="1C170E"/>
+                </a:solidFill>
+                <a:latin typeface="Segoe UI"/>
+              </a:rPr>
+              <a:t>Critic independently recomputes the score</a:t>
+            </a:r>
+          </a:p>
+          <a:p>
+            <a:pPr>
+              <a:spcBef>
+                <a:spcPts val="500"/>
+              </a:spcBef>
+            </a:pPr>
+            <a:r>
+              <a:rPr sz="1250" b="0" i="0">
+                <a:solidFill>
+                  <a:srgbClr val="1C170E"/>
+                </a:solidFill>
+                <a:latin typeface="Segoe UI"/>
+              </a:rPr>
+              <a:t>and rejects any inconsistent assessment.</a:t>
+            </a:r>
+          </a:p>
+          <a:p>
+            <a:pPr>
+              <a:spcBef>
+                <a:spcPts val="500"/>
+              </a:spcBef>
+            </a:pPr>
+            <a:r>
+              <a:rPr sz="1250" b="0" i="0">
+                <a:solidFill>
+                  <a:srgbClr val="1C170E"/>
+                </a:solidFill>
+                <a:latin typeface="Segoe UI"/>
+              </a:rPr>
+              <a:t/>
+            </a:r>
+          </a:p>
+          <a:p>
+            <a:pPr>
+              <a:spcBef>
+                <a:spcPts val="500"/>
+              </a:spcBef>
+            </a:pPr>
+            <a:r>
+              <a:rPr sz="1250" b="0" i="0">
+                <a:solidFill>
+                  <a:srgbClr val="1C170E"/>
+                </a:solidFill>
+                <a:latin typeface="Segoe UI"/>
+              </a:rPr>
+              <a:t>Output: a risk tier, triggered rules, and a</a:t>
+            </a:r>
+          </a:p>
+          <a:p>
+            <a:pPr>
+              <a:spcBef>
+                <a:spcPts val="500"/>
+              </a:spcBef>
+            </a:pPr>
+            <a:r>
+              <a:rPr sz="1250" b="0" i="0">
+                <a:solidFill>
+                  <a:srgbClr val="1C170E"/>
+                </a:solidFill>
+                <a:latin typeface="Segoe UI"/>
+              </a:rPr>
+              <a:t>JSON report the analyst can download.</a:t>
+            </a:r>
+          </a:p>
+        </p:txBody>
+      </p:sp>
+      <p:sp>
+        <p:nvSpPr>
+          <p:cNvPr id="7" name="Rectangle 6"/>
+          <p:cNvSpPr/>
+          <p:nvPr/>
+        </p:nvSpPr>
+        <p:spPr>
+          <a:xfrm>
+            <a:off x="4800600" y="1097280"/>
+            <a:ext cx="4114800" cy="5212080"/>
+          </a:xfrm>
+          <a:prstGeom prst="rect">
+            <a:avLst/>
+          </a:prstGeom>
+          <a:solidFill>
+            <a:srgbClr val="FBEED3"/>
+          </a:solidFill>
+          <a:ln w="22860">
+            <a:solidFill>
+              <a:srgbClr val="C29A3C"/>
+            </a:solidFill>
+          </a:ln>
+        </p:spPr>
+        <p:style>
+          <a:lnRef idx="1">
+            <a:schemeClr val="accent1"/>
+          </a:lnRef>
+          <a:fillRef idx="3">
+            <a:schemeClr val="accent1"/>
+          </a:fillRef>
+          <a:effectRef idx="2">
+            <a:schemeClr val="accent1"/>
+          </a:effectRef>
+          <a:fontRef idx="minor">
+            <a:schemeClr val="lt1"/>
+          </a:fontRef>
+        </p:style>
+        <p:txBody>
+          <a:bodyPr rtlCol="0" anchor="ctr"/>
+          <a:lstStyle/>
+          <a:p>
+            <a:pPr algn="ctr"/>
+          </a:p>
+        </p:txBody>
+      </p:sp>
+      <p:sp>
+        <p:nvSpPr>
+          <p:cNvPr id="8" name="TextBox 7"/>
+          <p:cNvSpPr txBox="1"/>
+          <p:nvPr/>
+        </p:nvSpPr>
+        <p:spPr>
+          <a:xfrm>
+            <a:off x="4983480" y="1188720"/>
+            <a:ext cx="3749039" cy="457200"/>
+          </a:xfrm>
+          <a:prstGeom prst="rect">
+            <a:avLst/>
+          </a:prstGeom>
+          <a:noFill/>
+        </p:spPr>
+        <p:txBody>
+          <a:bodyPr wrap="square">
+            <a:spAutoFit/>
+          </a:bodyPr>
+          <a:lstStyle/>
+          <a:p>
+            <a:pPr algn="l"/>
+            <a:r>
+              <a:rPr sz="1900" b="1" i="0">
+                <a:solidFill>
+                  <a:srgbClr val="2E6E38"/>
+                </a:solidFill>
+                <a:latin typeface="Caveat"/>
+              </a:rPr>
+              <a:t>Design principles</a:t>
+            </a:r>
+          </a:p>
+        </p:txBody>
+      </p:sp>
+      <p:sp>
+        <p:nvSpPr>
+          <p:cNvPr id="9" name="TextBox 8"/>
+          <p:cNvSpPr txBox="1"/>
+          <p:nvPr/>
+        </p:nvSpPr>
+        <p:spPr>
+          <a:xfrm>
+            <a:off x="4983480" y="1691640"/>
+            <a:ext cx="3840480" cy="4434840"/>
+          </a:xfrm>
+          <a:prstGeom prst="rect">
+            <a:avLst/>
+          </a:prstGeom>
+          <a:noFill/>
+        </p:spPr>
+        <p:txBody>
+          <a:bodyPr wrap="square">
+            <a:spAutoFit/>
+          </a:bodyPr>
+          <a:lstStyle/>
+          <a:p>
+            <a:pPr>
+              <a:spcBef>
+                <a:spcPts val="500"/>
+              </a:spcBef>
+            </a:pPr>
+            <a:r>
+              <a:rPr sz="1250" b="0" i="0">
+                <a:solidFill>
+                  <a:srgbClr val="1C170E"/>
+                </a:solidFill>
+                <a:latin typeface="Segoe UI"/>
+              </a:rPr>
+              <a:t>No ML models — scoring is rule-based.</a:t>
+            </a:r>
+          </a:p>
+          <a:p>
+            <a:pPr>
+              <a:spcBef>
+                <a:spcPts val="500"/>
+              </a:spcBef>
+            </a:pPr>
+            <a:r>
+              <a:rPr sz="1250" b="0" i="0">
+                <a:solidFill>
+                  <a:srgbClr val="1C170E"/>
+                </a:solidFill>
+                <a:latin typeface="Segoe UI"/>
+              </a:rPr>
+              <a:t>Every flag has a plain-language reason.</a:t>
+            </a:r>
+          </a:p>
+          <a:p>
+            <a:pPr>
+              <a:spcBef>
+                <a:spcPts val="500"/>
+              </a:spcBef>
+            </a:pPr>
+            <a:r>
+              <a:rPr sz="1250" b="0" i="0">
+                <a:solidFill>
+                  <a:srgbClr val="1C170E"/>
+                </a:solidFill>
+                <a:latin typeface="Segoe UI"/>
+              </a:rPr>
+              <a:t/>
+            </a:r>
+          </a:p>
+          <a:p>
+            <a:pPr>
+              <a:spcBef>
+                <a:spcPts val="500"/>
+              </a:spcBef>
+            </a:pPr>
+            <a:r>
+              <a:rPr sz="1250" b="0" i="0">
+                <a:solidFill>
+                  <a:srgbClr val="1C170E"/>
+                </a:solidFill>
+                <a:latin typeface="Segoe UI"/>
+              </a:rPr>
+              <a:t>Fail-closed: invalid input goes to manual</a:t>
+            </a:r>
+          </a:p>
+          <a:p>
+            <a:pPr>
+              <a:spcBef>
+                <a:spcPts val="500"/>
+              </a:spcBef>
+            </a:pPr>
+            <a:r>
+              <a:rPr sz="1250" b="0" i="0">
+                <a:solidFill>
+                  <a:srgbClr val="1C170E"/>
+                </a:solidFill>
+                <a:latin typeface="Segoe UI"/>
+              </a:rPr>
+              <a:t>review. The pipeline never manufactures data.</a:t>
+            </a:r>
+          </a:p>
+          <a:p>
+            <a:pPr>
+              <a:spcBef>
+                <a:spcPts val="500"/>
+              </a:spcBef>
+            </a:pPr>
+            <a:r>
+              <a:rPr sz="1250" b="0" i="0">
+                <a:solidFill>
+                  <a:srgbClr val="1C170E"/>
+                </a:solidFill>
+                <a:latin typeface="Segoe UI"/>
+              </a:rPr>
+              <a:t/>
+            </a:r>
+          </a:p>
+          <a:p>
+            <a:pPr>
+              <a:spcBef>
+                <a:spcPts val="500"/>
+              </a:spcBef>
+            </a:pPr>
+            <a:r>
+              <a:rPr sz="1250" b="0" i="0">
+                <a:solidFill>
+                  <a:srgbClr val="1C170E"/>
+                </a:solidFill>
+                <a:latin typeface="Segoe UI"/>
+              </a:rPr>
+              <a:t>Critic uses the same risk engine as Executor.</a:t>
+            </a:r>
+          </a:p>
+          <a:p>
+            <a:pPr>
+              <a:spcBef>
+                <a:spcPts val="500"/>
+              </a:spcBef>
+            </a:pPr>
+            <a:r>
+              <a:rPr sz="1250" b="0" i="0">
+                <a:solidFill>
+                  <a:srgbClr val="1C170E"/>
+                </a:solidFill>
+                <a:latin typeface="Segoe UI"/>
+              </a:rPr>
+              <a:t>There is no separate or easier scorer for it.</a:t>
+            </a:r>
+          </a:p>
+          <a:p>
+            <a:pPr>
+              <a:spcBef>
+                <a:spcPts val="500"/>
+              </a:spcBef>
+            </a:pPr>
+            <a:r>
+              <a:rPr sz="1250" b="0" i="0">
+                <a:solidFill>
+                  <a:srgbClr val="1C170E"/>
+                </a:solidFill>
+                <a:latin typeface="Segoe UI"/>
+              </a:rPr>
+              <a:t/>
+            </a:r>
+          </a:p>
+          <a:p>
+            <a:pPr>
+              <a:spcBef>
+                <a:spcPts val="500"/>
+              </a:spcBef>
+            </a:pPr>
+            <a:r>
+              <a:rPr sz="1250" b="0" i="0">
+                <a:solidFill>
+                  <a:srgbClr val="1C170E"/>
+                </a:solidFill>
+                <a:latin typeface="Segoe UI"/>
+              </a:rPr>
+              <a:t>Synthetic data only. Safe to share, run, and</a:t>
+            </a:r>
+          </a:p>
+          <a:p>
+            <a:pPr>
+              <a:spcBef>
+                <a:spcPts val="500"/>
+              </a:spcBef>
+            </a:pPr>
+            <a:r>
+              <a:rPr sz="1250" b="0" i="0">
+                <a:solidFill>
+                  <a:srgbClr val="1C170E"/>
+                </a:solidFill>
+                <a:latin typeface="Segoe UI"/>
+              </a:rPr>
+              <a:t>demonstrate without any PII risk.</a:t>
+            </a:r>
+          </a:p>
+          <a:p>
+            <a:pPr>
+              <a:spcBef>
+                <a:spcPts val="500"/>
+              </a:spcBef>
+            </a:pPr>
+            <a:r>
+              <a:rPr sz="1250" b="0" i="0">
+                <a:solidFill>
+                  <a:srgbClr val="1C170E"/>
+                </a:solidFill>
+                <a:latin typeface="Segoe UI"/>
+              </a:rPr>
+              <a:t/>
+            </a:r>
+          </a:p>
+          <a:p>
+            <a:pPr>
+              <a:spcBef>
+                <a:spcPts val="500"/>
+              </a:spcBef>
+            </a:pPr>
+            <a:r>
+              <a:rPr sz="1250" b="0" i="0">
+                <a:solidFill>
+                  <a:srgbClr val="1C170E"/>
+                </a:solidFill>
+                <a:latin typeface="Segoe UI"/>
+              </a:rPr>
+              <a:t>17 unit tests ship with the code. Changing a</a:t>
+            </a:r>
+          </a:p>
+          <a:p>
+            <a:pPr>
+              <a:spcBef>
+                <a:spcPts val="500"/>
+              </a:spcBef>
+            </a:pPr>
+            <a:r>
+              <a:rPr sz="1250" b="0" i="0">
+                <a:solidFill>
+                  <a:srgbClr val="1C170E"/>
+                </a:solidFill>
+                <a:latin typeface="Segoe UI"/>
+              </a:rPr>
+              <a:t>rule breaks a test before it breaks a demo.</a:t>
+            </a:r>
+          </a:p>
+          <a:p>
+            <a:pPr>
+              <a:spcBef>
+                <a:spcPts val="500"/>
+              </a:spcBef>
+            </a:pPr>
+            <a:r>
+              <a:rPr sz="1250" b="0" i="0">
+                <a:solidFill>
+                  <a:srgbClr val="1C170E"/>
+                </a:solidFill>
+                <a:latin typeface="Segoe UI"/>
+              </a:rPr>
+              <a:t/>
+            </a:r>
+          </a:p>
+          <a:p>
+            <a:pPr>
+              <a:spcBef>
+                <a:spcPts val="500"/>
+              </a:spcBef>
+            </a:pPr>
+            <a:r>
+              <a:rPr sz="1250" b="0" i="0">
+                <a:solidFill>
+                  <a:srgbClr val="1C170E"/>
+                </a:solidFill>
+                <a:latin typeface="Segoe UI"/>
+              </a:rPr>
+              <a:t>Scores are illustrative. The system recommends</a:t>
+            </a:r>
+          </a:p>
+          <a:p>
+            <a:pPr>
+              <a:spcBef>
+                <a:spcPts val="500"/>
+              </a:spcBef>
+            </a:pPr>
+            <a:r>
+              <a:rPr sz="1250" b="0" i="0">
+                <a:solidFill>
+                  <a:srgbClr val="1C170E"/>
+                </a:solidFill>
+                <a:latin typeface="Segoe UI"/>
+              </a:rPr>
+              <a:t>human review and cannot block transactions.</a:t>
             </a:r>
           </a:p>
         </p:txBody>
@@ -3492,7 +4432,7 @@
     <p:bg>
       <p:bgPr>
         <a:solidFill>
-          <a:srgbClr val="FFFFFF"/>
+          <a:srgbClr val="FDF6E3"/>
         </a:solidFill>
         <a:effectLst/>
       </p:bgPr>
@@ -3513,15 +4453,15 @@
         <p:spPr>
           <a:xfrm>
             <a:off x="0" y="0"/>
-            <a:ext cx="12191695" cy="411480"/>
+            <a:ext cx="9144000" cy="960120"/>
           </a:xfrm>
           <a:prstGeom prst="rect">
             <a:avLst/>
           </a:prstGeom>
           <a:solidFill>
-            <a:srgbClr val="248CA0"/>
+            <a:srgbClr val="D95F1A"/>
           </a:solidFill>
-          <a:ln>
+          <a:ln w="19050">
             <a:noFill/>
           </a:ln>
         </p:spPr>
@@ -3555,43 +4495,8 @@
         </p:nvSpPr>
         <p:spPr>
           <a:xfrm>
-            <a:off x="640080" y="685800"/>
-            <a:ext cx="9601200" cy="640080"/>
-          </a:xfrm>
-          <a:prstGeom prst="rect">
-            <a:avLst/>
-          </a:prstGeom>
-          <a:noFill/>
-        </p:spPr>
-        <p:txBody>
-          <a:bodyPr wrap="none">
-            <a:spAutoFit/>
-          </a:bodyPr>
-          <a:lstStyle/>
-          <a:p>
-            <a:pPr>
-              <a:defRPr sz="2400" b="1">
-                <a:solidFill>
-                  <a:srgbClr val="122340"/>
-                </a:solidFill>
-              </a:defRPr>
-            </a:pPr>
-            <a:r>
-              <a:t>Proposed Solution</a:t>
-            </a:r>
-          </a:p>
-        </p:txBody>
-      </p:sp>
-      <p:sp>
-        <p:nvSpPr>
-          <p:cNvPr id="4" name="TextBox 3"/>
-          <p:cNvSpPr txBox="1"/>
-          <p:nvPr/>
-        </p:nvSpPr>
-        <p:spPr>
-          <a:xfrm>
-            <a:off x="731520" y="1463040"/>
-            <a:ext cx="10241280" cy="4389120"/>
+            <a:off x="256032" y="91440"/>
+            <a:ext cx="8686800" cy="777240"/>
           </a:xfrm>
           <a:prstGeom prst="rect">
             <a:avLst/>
@@ -3604,63 +4509,610 @@
           </a:bodyPr>
           <a:lstStyle/>
           <a:p>
-            <a:pPr>
-              <a:spcAft>
-                <a:spcPts val="1000"/>
-              </a:spcAft>
-              <a:defRPr sz="2000">
-                <a:solidFill>
-                  <a:srgbClr val="1E1E1E"/>
-                </a:solidFill>
-              </a:defRPr>
-            </a:pPr>
-            <a:r>
-              <a:t>Build a multi-agent workflow for suspicious transaction investigation.</a:t>
-            </a:r>
-          </a:p>
-          <a:p>
-            <a:pPr>
-              <a:spcAft>
-                <a:spcPts val="1000"/>
-              </a:spcAft>
-              <a:defRPr sz="2000">
-                <a:solidFill>
-                  <a:srgbClr val="1E1E1E"/>
-                </a:solidFill>
-              </a:defRPr>
-            </a:pPr>
-            <a:r>
-              <a:t>Planner identifies what to check, Research gathers evidence, Executor runs the rule engine, Critic validates the result.</a:t>
-            </a:r>
-          </a:p>
-          <a:p>
-            <a:pPr>
-              <a:spcAft>
-                <a:spcPts val="1000"/>
-              </a:spcAft>
-              <a:defRPr sz="2000">
-                <a:solidFill>
-                  <a:srgbClr val="1E1E1E"/>
-                </a:solidFill>
-              </a:defRPr>
-            </a:pPr>
-            <a:r>
-              <a:t>The system supports analyst review instead of making automated blocking decisions.</a:t>
-            </a:r>
-          </a:p>
-          <a:p>
-            <a:pPr>
-              <a:spcAft>
-                <a:spcPts val="1000"/>
-              </a:spcAft>
-              <a:defRPr sz="2000">
-                <a:solidFill>
-                  <a:srgbClr val="1E1E1E"/>
-                </a:solidFill>
-              </a:defRPr>
-            </a:pPr>
-            <a:r>
-              <a:t>The result is explainable, deterministic, and safe for a classroom PoC.</a:t>
+            <a:pPr algn="l"/>
+            <a:r>
+              <a:rPr sz="3000" b="1" i="0">
+                <a:solidFill>
+                  <a:srgbClr val="FDF6E3"/>
+                </a:solidFill>
+                <a:latin typeface="Caveat"/>
+              </a:rPr>
+              <a:t>Problem Statement</a:t>
+            </a:r>
+          </a:p>
+        </p:txBody>
+      </p:sp>
+      <p:sp>
+        <p:nvSpPr>
+          <p:cNvPr id="4" name="Rectangle 3"/>
+          <p:cNvSpPr/>
+          <p:nvPr/>
+        </p:nvSpPr>
+        <p:spPr>
+          <a:xfrm>
+            <a:off x="274320" y="1097280"/>
+            <a:ext cx="8595360" cy="1005840"/>
+          </a:xfrm>
+          <a:prstGeom prst="rect">
+            <a:avLst/>
+          </a:prstGeom>
+          <a:solidFill>
+            <a:srgbClr val="FFF0D0"/>
+          </a:solidFill>
+          <a:ln w="22860">
+            <a:solidFill>
+              <a:srgbClr val="D95F1A"/>
+            </a:solidFill>
+          </a:ln>
+        </p:spPr>
+        <p:style>
+          <a:lnRef idx="1">
+            <a:schemeClr val="accent1"/>
+          </a:lnRef>
+          <a:fillRef idx="3">
+            <a:schemeClr val="accent1"/>
+          </a:fillRef>
+          <a:effectRef idx="2">
+            <a:schemeClr val="accent1"/>
+          </a:effectRef>
+          <a:fontRef idx="minor">
+            <a:schemeClr val="lt1"/>
+          </a:fontRef>
+        </p:style>
+        <p:txBody>
+          <a:bodyPr rtlCol="0" anchor="ctr"/>
+          <a:lstStyle/>
+          <a:p>
+            <a:pPr algn="ctr"/>
+          </a:p>
+        </p:txBody>
+      </p:sp>
+      <p:sp>
+        <p:nvSpPr>
+          <p:cNvPr id="5" name="TextBox 4"/>
+          <p:cNvSpPr txBox="1"/>
+          <p:nvPr/>
+        </p:nvSpPr>
+        <p:spPr>
+          <a:xfrm>
+            <a:off x="457200" y="1161288"/>
+            <a:ext cx="8229600" cy="822960"/>
+          </a:xfrm>
+          <a:prstGeom prst="rect">
+            <a:avLst/>
+          </a:prstGeom>
+          <a:noFill/>
+        </p:spPr>
+        <p:txBody>
+          <a:bodyPr wrap="square">
+            <a:spAutoFit/>
+          </a:bodyPr>
+          <a:lstStyle/>
+          <a:p>
+            <a:pPr algn="ctr"/>
+            <a:r>
+              <a:rPr sz="1600" b="0" i="1">
+                <a:solidFill>
+                  <a:srgbClr val="1C170E"/>
+                </a:solidFill>
+                <a:latin typeface="Caveat"/>
+              </a:rPr>
+              <a:t>"Fraud teams spend most of their time deciding what to look at, not actually looking at it."</a:t>
+            </a:r>
+          </a:p>
+        </p:txBody>
+      </p:sp>
+      <p:sp>
+        <p:nvSpPr>
+          <p:cNvPr id="6" name="Rectangle 5"/>
+          <p:cNvSpPr/>
+          <p:nvPr/>
+        </p:nvSpPr>
+        <p:spPr>
+          <a:xfrm>
+            <a:off x="256032" y="2267712"/>
+            <a:ext cx="2743200" cy="3931920"/>
+          </a:xfrm>
+          <a:prstGeom prst="rect">
+            <a:avLst/>
+          </a:prstGeom>
+          <a:solidFill>
+            <a:srgbClr val="FBEED3"/>
+          </a:solidFill>
+          <a:ln w="22860">
+            <a:solidFill>
+              <a:srgbClr val="C29A3C"/>
+            </a:solidFill>
+          </a:ln>
+        </p:spPr>
+        <p:style>
+          <a:lnRef idx="1">
+            <a:schemeClr val="accent1"/>
+          </a:lnRef>
+          <a:fillRef idx="3">
+            <a:schemeClr val="accent1"/>
+          </a:fillRef>
+          <a:effectRef idx="2">
+            <a:schemeClr val="accent1"/>
+          </a:effectRef>
+          <a:fontRef idx="minor">
+            <a:schemeClr val="lt1"/>
+          </a:fontRef>
+        </p:style>
+        <p:txBody>
+          <a:bodyPr rtlCol="0" anchor="ctr"/>
+          <a:lstStyle/>
+          <a:p>
+            <a:pPr algn="ctr"/>
+          </a:p>
+        </p:txBody>
+      </p:sp>
+      <p:sp>
+        <p:nvSpPr>
+          <p:cNvPr id="7" name="Rectangle 6"/>
+          <p:cNvSpPr/>
+          <p:nvPr/>
+        </p:nvSpPr>
+        <p:spPr>
+          <a:xfrm>
+            <a:off x="256032" y="2267712"/>
+            <a:ext cx="2743200" cy="365760"/>
+          </a:xfrm>
+          <a:prstGeom prst="rect">
+            <a:avLst/>
+          </a:prstGeom>
+          <a:solidFill>
+            <a:srgbClr val="D95F1A"/>
+          </a:solidFill>
+          <a:ln w="19050">
+            <a:noFill/>
+          </a:ln>
+        </p:spPr>
+        <p:style>
+          <a:lnRef idx="1">
+            <a:schemeClr val="accent1"/>
+          </a:lnRef>
+          <a:fillRef idx="3">
+            <a:schemeClr val="accent1"/>
+          </a:fillRef>
+          <a:effectRef idx="2">
+            <a:schemeClr val="accent1"/>
+          </a:effectRef>
+          <a:fontRef idx="minor">
+            <a:schemeClr val="lt1"/>
+          </a:fontRef>
+        </p:style>
+        <p:txBody>
+          <a:bodyPr rtlCol="0" anchor="ctr"/>
+          <a:lstStyle/>
+          <a:p>
+            <a:pPr algn="ctr"/>
+          </a:p>
+        </p:txBody>
+      </p:sp>
+      <p:sp>
+        <p:nvSpPr>
+          <p:cNvPr id="8" name="TextBox 7"/>
+          <p:cNvSpPr txBox="1"/>
+          <p:nvPr/>
+        </p:nvSpPr>
+        <p:spPr>
+          <a:xfrm>
+            <a:off x="347472" y="2286000"/>
+            <a:ext cx="2560320" cy="329184"/>
+          </a:xfrm>
+          <a:prstGeom prst="rect">
+            <a:avLst/>
+          </a:prstGeom>
+          <a:noFill/>
+        </p:spPr>
+        <p:txBody>
+          <a:bodyPr wrap="square">
+            <a:spAutoFit/>
+          </a:bodyPr>
+          <a:lstStyle/>
+          <a:p>
+            <a:pPr algn="l"/>
+            <a:r>
+              <a:rPr sz="1150" b="1" i="0">
+                <a:solidFill>
+                  <a:srgbClr val="FDF6E3"/>
+                </a:solidFill>
+                <a:latin typeface="Segoe UI"/>
+              </a:rPr>
+              <a:t>Black-box detection</a:t>
+            </a:r>
+          </a:p>
+        </p:txBody>
+      </p:sp>
+      <p:sp>
+        <p:nvSpPr>
+          <p:cNvPr id="9" name="TextBox 8"/>
+          <p:cNvSpPr txBox="1"/>
+          <p:nvPr/>
+        </p:nvSpPr>
+        <p:spPr>
+          <a:xfrm>
+            <a:off x="384048" y="2743200"/>
+            <a:ext cx="2514600" cy="3291840"/>
+          </a:xfrm>
+          <a:prstGeom prst="rect">
+            <a:avLst/>
+          </a:prstGeom>
+          <a:noFill/>
+        </p:spPr>
+        <p:txBody>
+          <a:bodyPr wrap="square">
+            <a:spAutoFit/>
+          </a:bodyPr>
+          <a:lstStyle/>
+          <a:p>
+            <a:pPr algn="l"/>
+            <a:r>
+              <a:rPr sz="1200" b="0" i="0">
+                <a:solidFill>
+                  <a:srgbClr val="1C170E"/>
+                </a:solidFill>
+                <a:latin typeface="Segoe UI"/>
+              </a:rPr>
+              <a:t>A neural network outputs a probability — not a
+reason. In a compliance meeting, "87% fraud" is
+not an answer. A triggered rule list is.</a:t>
+            </a:r>
+          </a:p>
+        </p:txBody>
+      </p:sp>
+      <p:sp>
+        <p:nvSpPr>
+          <p:cNvPr id="10" name="Rectangle 9"/>
+          <p:cNvSpPr/>
+          <p:nvPr/>
+        </p:nvSpPr>
+        <p:spPr>
+          <a:xfrm>
+            <a:off x="3200400" y="2267712"/>
+            <a:ext cx="2743200" cy="3931920"/>
+          </a:xfrm>
+          <a:prstGeom prst="rect">
+            <a:avLst/>
+          </a:prstGeom>
+          <a:solidFill>
+            <a:srgbClr val="FBEED3"/>
+          </a:solidFill>
+          <a:ln w="22860">
+            <a:solidFill>
+              <a:srgbClr val="C29A3C"/>
+            </a:solidFill>
+          </a:ln>
+        </p:spPr>
+        <p:style>
+          <a:lnRef idx="1">
+            <a:schemeClr val="accent1"/>
+          </a:lnRef>
+          <a:fillRef idx="3">
+            <a:schemeClr val="accent1"/>
+          </a:fillRef>
+          <a:effectRef idx="2">
+            <a:schemeClr val="accent1"/>
+          </a:effectRef>
+          <a:fontRef idx="minor">
+            <a:schemeClr val="lt1"/>
+          </a:fontRef>
+        </p:style>
+        <p:txBody>
+          <a:bodyPr rtlCol="0" anchor="ctr"/>
+          <a:lstStyle/>
+          <a:p>
+            <a:pPr algn="ctr"/>
+          </a:p>
+        </p:txBody>
+      </p:sp>
+      <p:sp>
+        <p:nvSpPr>
+          <p:cNvPr id="11" name="Rectangle 10"/>
+          <p:cNvSpPr/>
+          <p:nvPr/>
+        </p:nvSpPr>
+        <p:spPr>
+          <a:xfrm>
+            <a:off x="3200400" y="2267712"/>
+            <a:ext cx="2743200" cy="365760"/>
+          </a:xfrm>
+          <a:prstGeom prst="rect">
+            <a:avLst/>
+          </a:prstGeom>
+          <a:solidFill>
+            <a:srgbClr val="D95F1A"/>
+          </a:solidFill>
+          <a:ln w="19050">
+            <a:noFill/>
+          </a:ln>
+        </p:spPr>
+        <p:style>
+          <a:lnRef idx="1">
+            <a:schemeClr val="accent1"/>
+          </a:lnRef>
+          <a:fillRef idx="3">
+            <a:schemeClr val="accent1"/>
+          </a:fillRef>
+          <a:effectRef idx="2">
+            <a:schemeClr val="accent1"/>
+          </a:effectRef>
+          <a:fontRef idx="minor">
+            <a:schemeClr val="lt1"/>
+          </a:fontRef>
+        </p:style>
+        <p:txBody>
+          <a:bodyPr rtlCol="0" anchor="ctr"/>
+          <a:lstStyle/>
+          <a:p>
+            <a:pPr algn="ctr"/>
+          </a:p>
+        </p:txBody>
+      </p:sp>
+      <p:sp>
+        <p:nvSpPr>
+          <p:cNvPr id="12" name="TextBox 11"/>
+          <p:cNvSpPr txBox="1"/>
+          <p:nvPr/>
+        </p:nvSpPr>
+        <p:spPr>
+          <a:xfrm>
+            <a:off x="3291840" y="2286000"/>
+            <a:ext cx="2560320" cy="329184"/>
+          </a:xfrm>
+          <a:prstGeom prst="rect">
+            <a:avLst/>
+          </a:prstGeom>
+          <a:noFill/>
+        </p:spPr>
+        <p:txBody>
+          <a:bodyPr wrap="square">
+            <a:spAutoFit/>
+          </a:bodyPr>
+          <a:lstStyle/>
+          <a:p>
+            <a:pPr algn="l"/>
+            <a:r>
+              <a:rPr sz="1150" b="1" i="0">
+                <a:solidFill>
+                  <a:srgbClr val="FDF6E3"/>
+                </a:solidFill>
+                <a:latin typeface="Segoe UI"/>
+              </a:rPr>
+              <a:t>Unstructured triage</a:t>
+            </a:r>
+          </a:p>
+        </p:txBody>
+      </p:sp>
+      <p:sp>
+        <p:nvSpPr>
+          <p:cNvPr id="13" name="TextBox 12"/>
+          <p:cNvSpPr txBox="1"/>
+          <p:nvPr/>
+        </p:nvSpPr>
+        <p:spPr>
+          <a:xfrm>
+            <a:off x="3328416" y="2743200"/>
+            <a:ext cx="2514600" cy="3291840"/>
+          </a:xfrm>
+          <a:prstGeom prst="rect">
+            <a:avLst/>
+          </a:prstGeom>
+          <a:noFill/>
+        </p:spPr>
+        <p:txBody>
+          <a:bodyPr wrap="square">
+            <a:spAutoFit/>
+          </a:bodyPr>
+          <a:lstStyle/>
+          <a:p>
+            <a:pPr algn="l"/>
+            <a:r>
+              <a:rPr sz="1200" b="0" i="0">
+                <a:solidFill>
+                  <a:srgbClr val="1C170E"/>
+                </a:solidFill>
+                <a:latin typeface="Segoe UI"/>
+              </a:rPr>
+              <a:t>Without a fixed investigation workflow, two
+analysts reviewing the same transaction apply
+different checks and reach different conclusions.</a:t>
+            </a:r>
+          </a:p>
+        </p:txBody>
+      </p:sp>
+      <p:sp>
+        <p:nvSpPr>
+          <p:cNvPr id="14" name="Rectangle 13"/>
+          <p:cNvSpPr/>
+          <p:nvPr/>
+        </p:nvSpPr>
+        <p:spPr>
+          <a:xfrm>
+            <a:off x="6144768" y="2267712"/>
+            <a:ext cx="2743200" cy="3931920"/>
+          </a:xfrm>
+          <a:prstGeom prst="rect">
+            <a:avLst/>
+          </a:prstGeom>
+          <a:solidFill>
+            <a:srgbClr val="FBEED3"/>
+          </a:solidFill>
+          <a:ln w="22860">
+            <a:solidFill>
+              <a:srgbClr val="C29A3C"/>
+            </a:solidFill>
+          </a:ln>
+        </p:spPr>
+        <p:style>
+          <a:lnRef idx="1">
+            <a:schemeClr val="accent1"/>
+          </a:lnRef>
+          <a:fillRef idx="3">
+            <a:schemeClr val="accent1"/>
+          </a:fillRef>
+          <a:effectRef idx="2">
+            <a:schemeClr val="accent1"/>
+          </a:effectRef>
+          <a:fontRef idx="minor">
+            <a:schemeClr val="lt1"/>
+          </a:fontRef>
+        </p:style>
+        <p:txBody>
+          <a:bodyPr rtlCol="0" anchor="ctr"/>
+          <a:lstStyle/>
+          <a:p>
+            <a:pPr algn="ctr"/>
+          </a:p>
+        </p:txBody>
+      </p:sp>
+      <p:sp>
+        <p:nvSpPr>
+          <p:cNvPr id="15" name="Rectangle 14"/>
+          <p:cNvSpPr/>
+          <p:nvPr/>
+        </p:nvSpPr>
+        <p:spPr>
+          <a:xfrm>
+            <a:off x="6144768" y="2267712"/>
+            <a:ext cx="2743200" cy="365760"/>
+          </a:xfrm>
+          <a:prstGeom prst="rect">
+            <a:avLst/>
+          </a:prstGeom>
+          <a:solidFill>
+            <a:srgbClr val="D95F1A"/>
+          </a:solidFill>
+          <a:ln w="19050">
+            <a:noFill/>
+          </a:ln>
+        </p:spPr>
+        <p:style>
+          <a:lnRef idx="1">
+            <a:schemeClr val="accent1"/>
+          </a:lnRef>
+          <a:fillRef idx="3">
+            <a:schemeClr val="accent1"/>
+          </a:fillRef>
+          <a:effectRef idx="2">
+            <a:schemeClr val="accent1"/>
+          </a:effectRef>
+          <a:fontRef idx="minor">
+            <a:schemeClr val="lt1"/>
+          </a:fontRef>
+        </p:style>
+        <p:txBody>
+          <a:bodyPr rtlCol="0" anchor="ctr"/>
+          <a:lstStyle/>
+          <a:p>
+            <a:pPr algn="ctr"/>
+          </a:p>
+        </p:txBody>
+      </p:sp>
+      <p:sp>
+        <p:nvSpPr>
+          <p:cNvPr id="16" name="TextBox 15"/>
+          <p:cNvSpPr txBox="1"/>
+          <p:nvPr/>
+        </p:nvSpPr>
+        <p:spPr>
+          <a:xfrm>
+            <a:off x="6236208" y="2286000"/>
+            <a:ext cx="2560320" cy="329184"/>
+          </a:xfrm>
+          <a:prstGeom prst="rect">
+            <a:avLst/>
+          </a:prstGeom>
+          <a:noFill/>
+        </p:spPr>
+        <p:txBody>
+          <a:bodyPr wrap="square">
+            <a:spAutoFit/>
+          </a:bodyPr>
+          <a:lstStyle/>
+          <a:p>
+            <a:pPr algn="l"/>
+            <a:r>
+              <a:rPr sz="1150" b="1" i="0">
+                <a:solidFill>
+                  <a:srgbClr val="FDF6E3"/>
+                </a:solidFill>
+                <a:latin typeface="Segoe UI"/>
+              </a:rPr>
+              <a:t>No accessible baseline</a:t>
+            </a:r>
+          </a:p>
+        </p:txBody>
+      </p:sp>
+      <p:sp>
+        <p:nvSpPr>
+          <p:cNvPr id="17" name="TextBox 16"/>
+          <p:cNvSpPr txBox="1"/>
+          <p:nvPr/>
+        </p:nvSpPr>
+        <p:spPr>
+          <a:xfrm>
+            <a:off x="6272784" y="2743200"/>
+            <a:ext cx="2514600" cy="3291840"/>
+          </a:xfrm>
+          <a:prstGeom prst="rect">
+            <a:avLst/>
+          </a:prstGeom>
+          <a:noFill/>
+        </p:spPr>
+        <p:txBody>
+          <a:bodyPr wrap="square">
+            <a:spAutoFit/>
+          </a:bodyPr>
+          <a:lstStyle/>
+          <a:p>
+            <a:pPr algn="l"/>
+            <a:r>
+              <a:rPr sz="1200" b="0" i="0">
+                <a:solidFill>
+                  <a:srgbClr val="1C170E"/>
+                </a:solidFill>
+                <a:latin typeface="Segoe UI"/>
+              </a:rPr>
+              <a:t>Production fraud stacks need ML engineers and
+live data pipelines. Students and small teams
+have no working reference to learn from.</a:t>
+            </a:r>
+          </a:p>
+        </p:txBody>
+      </p:sp>
+      <p:sp>
+        <p:nvSpPr>
+          <p:cNvPr id="18" name="TextBox 17"/>
+          <p:cNvSpPr txBox="1"/>
+          <p:nvPr/>
+        </p:nvSpPr>
+        <p:spPr>
+          <a:xfrm>
+            <a:off x="274320" y="6291072"/>
+            <a:ext cx="8595360" cy="384048"/>
+          </a:xfrm>
+          <a:prstGeom prst="rect">
+            <a:avLst/>
+          </a:prstGeom>
+          <a:noFill/>
+        </p:spPr>
+        <p:txBody>
+          <a:bodyPr wrap="square">
+            <a:spAutoFit/>
+          </a:bodyPr>
+          <a:lstStyle/>
+          <a:p>
+            <a:pPr algn="ctr"/>
+            <a:r>
+              <a:rPr sz="1200" b="0" i="1">
+                <a:solidFill>
+                  <a:srgbClr val="1B4F8A"/>
+                </a:solidFill>
+                <a:latin typeface="Segoe UI"/>
+              </a:rPr>
+              <a:t>FinGuard AI gives teams a transparent, step-by-step workflow they can read, audit, and extend.</a:t>
             </a:r>
           </a:p>
         </p:txBody>
@@ -3679,7 +5131,7 @@
     <p:bg>
       <p:bgPr>
         <a:solidFill>
-          <a:srgbClr val="FFFFFF"/>
+          <a:srgbClr val="FDF6E3"/>
         </a:solidFill>
         <a:effectLst/>
       </p:bgPr>
@@ -3700,15 +5152,15 @@
         <p:spPr>
           <a:xfrm>
             <a:off x="0" y="0"/>
-            <a:ext cx="12191695" cy="411480"/>
+            <a:ext cx="9144000" cy="960120"/>
           </a:xfrm>
           <a:prstGeom prst="rect">
             <a:avLst/>
           </a:prstGeom>
           <a:solidFill>
-            <a:srgbClr val="2862A8"/>
+            <a:srgbClr val="1B4F8A"/>
           </a:solidFill>
-          <a:ln>
+          <a:ln w="19050">
             <a:noFill/>
           </a:ln>
         </p:spPr>
@@ -3742,8 +5194,8 @@
         </p:nvSpPr>
         <p:spPr>
           <a:xfrm>
-            <a:off x="640080" y="685800"/>
-            <a:ext cx="9601200" cy="457200"/>
+            <a:off x="256032" y="91440"/>
+            <a:ext cx="8686800" cy="777240"/>
           </a:xfrm>
           <a:prstGeom prst="rect">
             <a:avLst/>
@@ -3751,248 +5203,79 @@
           <a:noFill/>
         </p:spPr>
         <p:txBody>
-          <a:bodyPr wrap="none">
+          <a:bodyPr wrap="square">
             <a:spAutoFit/>
           </a:bodyPr>
           <a:lstStyle/>
           <a:p>
-            <a:pPr>
-              <a:defRPr b="1" sz="2200">
-                <a:solidFill>
-                  <a:srgbClr val="122340"/>
-                </a:solidFill>
-              </a:defRPr>
-            </a:pPr>
-            <a:r>
-              <a:t>Agent Responsibilities</a:t>
-            </a:r>
-          </a:p>
-        </p:txBody>
-      </p:sp>
-      <p:sp>
-        <p:nvSpPr>
-          <p:cNvPr id="4" name="Rectangle 3"/>
-          <p:cNvSpPr/>
-          <p:nvPr/>
-        </p:nvSpPr>
-        <p:spPr>
-          <a:xfrm>
-            <a:off x="731520" y="1371600"/>
-            <a:ext cx="4937760" cy="4389120"/>
-          </a:xfrm>
-          <a:prstGeom prst="rect">
-            <a:avLst/>
-          </a:prstGeom>
-          <a:solidFill>
-            <a:srgbClr val="EEF5FF"/>
-          </a:solidFill>
-          <a:ln w="19050">
-            <a:solidFill>
-              <a:srgbClr val="2862A8"/>
-            </a:solidFill>
-          </a:ln>
-        </p:spPr>
-        <p:style>
-          <a:lnRef idx="1">
-            <a:schemeClr val="accent1"/>
-          </a:lnRef>
-          <a:fillRef idx="3">
-            <a:schemeClr val="accent1"/>
-          </a:fillRef>
-          <a:effectRef idx="2">
-            <a:schemeClr val="accent1"/>
-          </a:effectRef>
-          <a:fontRef idx="minor">
-            <a:schemeClr val="lt1"/>
-          </a:fontRef>
-        </p:style>
-        <p:txBody>
-          <a:bodyPr rtlCol="0" anchor="ctr" wrap="square"/>
-          <a:lstStyle/>
-          <a:p>
-            <a:pPr algn="ctr">
-              <a:defRPr b="1" sz="1800">
-                <a:solidFill>
-                  <a:srgbClr val="122340"/>
-                </a:solidFill>
-              </a:defRPr>
-            </a:pPr>
-            <a:r>
-              <a:t>Core workflow</a:t>
-            </a:r>
-          </a:p>
-          <a:p>
-            <a:pPr>
-              <a:spcAft>
-                <a:spcPts val="800"/>
-              </a:spcAft>
-              <a:defRPr sz="1600">
-                <a:solidFill>
-                  <a:srgbClr val="1E1E1E"/>
-                </a:solidFill>
-              </a:defRPr>
-            </a:pPr>
-            <a:r>
-              <a:t>Planner Agent: defines investigation steps and checks required transaction fields.</a:t>
-            </a:r>
-          </a:p>
-          <a:p>
-            <a:pPr>
-              <a:spcAft>
-                <a:spcPts val="800"/>
-              </a:spcAft>
-              <a:defRPr sz="1600">
-                <a:solidFill>
-                  <a:srgbClr val="1E1E1E"/>
-                </a:solidFill>
-              </a:defRPr>
-            </a:pPr>
-            <a:r>
-              <a:t>Research Agent: collects evidence such as amount, location, frequency, new beneficiary, and unusual time.</a:t>
-            </a:r>
-          </a:p>
-          <a:p>
-            <a:pPr>
-              <a:spcAft>
-                <a:spcPts val="800"/>
-              </a:spcAft>
-              <a:defRPr sz="1600">
-                <a:solidFill>
-                  <a:srgbClr val="1E1E1E"/>
-                </a:solidFill>
-              </a:defRPr>
-            </a:pPr>
-            <a:r>
-              <a:t>Executor Agent: runs the Python risk engine and computes the score.</a:t>
-            </a:r>
-          </a:p>
-          <a:p>
-            <a:pPr>
-              <a:spcAft>
-                <a:spcPts val="800"/>
-              </a:spcAft>
-              <a:defRPr sz="1600">
-                <a:solidFill>
-                  <a:srgbClr val="1E1E1E"/>
-                </a:solidFill>
-              </a:defRPr>
-            </a:pPr>
-            <a:r>
-              <a:t>Critic Agent: independently validates the assessment and rejects mismatches.</a:t>
-            </a:r>
-          </a:p>
-        </p:txBody>
-      </p:sp>
-      <p:sp>
-        <p:nvSpPr>
-          <p:cNvPr id="5" name="Rectangle 4"/>
-          <p:cNvSpPr/>
-          <p:nvPr/>
-        </p:nvSpPr>
-        <p:spPr>
-          <a:xfrm>
-            <a:off x="6126480" y="1371600"/>
-            <a:ext cx="5303520" cy="4389120"/>
-          </a:xfrm>
-          <a:prstGeom prst="rect">
-            <a:avLst/>
-          </a:prstGeom>
-          <a:solidFill>
-            <a:srgbClr val="EEF5FF"/>
-          </a:solidFill>
-          <a:ln w="19050">
-            <a:solidFill>
-              <a:srgbClr val="2862A8"/>
-            </a:solidFill>
-          </a:ln>
-        </p:spPr>
-        <p:style>
-          <a:lnRef idx="1">
-            <a:schemeClr val="accent1"/>
-          </a:lnRef>
-          <a:fillRef idx="3">
-            <a:schemeClr val="accent1"/>
-          </a:fillRef>
-          <a:effectRef idx="2">
-            <a:schemeClr val="accent1"/>
-          </a:effectRef>
-          <a:fontRef idx="minor">
-            <a:schemeClr val="lt1"/>
-          </a:fontRef>
-        </p:style>
-        <p:txBody>
-          <a:bodyPr rtlCol="0" anchor="ctr" wrap="square"/>
-          <a:lstStyle/>
-          <a:p>
-            <a:pPr algn="ctr">
-              <a:defRPr b="1" sz="1800">
-                <a:solidFill>
-                  <a:srgbClr val="122340"/>
-                </a:solidFill>
-              </a:defRPr>
-            </a:pPr>
-            <a:r>
-              <a:t>Why this matters</a:t>
-            </a:r>
-          </a:p>
-          <a:p>
-            <a:pPr>
-              <a:spcAft>
-                <a:spcPts val="800"/>
-              </a:spcAft>
-              <a:defRPr sz="1600">
-                <a:solidFill>
-                  <a:srgbClr val="1E1E1E"/>
-                </a:solidFill>
-              </a:defRPr>
-            </a:pPr>
-            <a:r>
-              <a:t>Each agent has a clear responsibility.</a:t>
-            </a:r>
-          </a:p>
-          <a:p>
-            <a:pPr>
-              <a:spcAft>
-                <a:spcPts val="800"/>
-              </a:spcAft>
-              <a:defRPr sz="1600">
-                <a:solidFill>
-                  <a:srgbClr val="1E1E1E"/>
-                </a:solidFill>
-              </a:defRPr>
-            </a:pPr>
-            <a:r>
-              <a:t>The system is modular and easier to explain.</a:t>
-            </a:r>
-          </a:p>
-          <a:p>
-            <a:pPr>
-              <a:spcAft>
-                <a:spcPts val="800"/>
-              </a:spcAft>
-              <a:defRPr sz="1600">
-                <a:solidFill>
-                  <a:srgbClr val="1E1E1E"/>
-                </a:solidFill>
-              </a:defRPr>
-            </a:pPr>
-            <a:r>
-              <a:t>Validation reduces false confidence and supports safe human review.</a:t>
-            </a:r>
-          </a:p>
-          <a:p>
-            <a:pPr>
-              <a:spcAft>
-                <a:spcPts val="800"/>
-              </a:spcAft>
-              <a:defRPr sz="1600">
-                <a:solidFill>
-                  <a:srgbClr val="1E1E1E"/>
-                </a:solidFill>
-              </a:defRPr>
-            </a:pPr>
-            <a:r>
-              <a:t>The workflow demonstrates real agentic collaboration in a small PoC.</a:t>
+            <a:pPr algn="l"/>
+            <a:r>
+              <a:rPr sz="3000" b="1" i="0">
+                <a:solidFill>
+                  <a:srgbClr val="FDF6E3"/>
+                </a:solidFill>
+                <a:latin typeface="Caveat"/>
+              </a:rPr>
+              <a:t>Architecture</a:t>
+            </a:r>
+          </a:p>
+        </p:txBody>
+      </p:sp>
+      <p:pic>
+        <p:nvPicPr>
+          <p:cNvPr id="4" name="Picture 3" descr="media_1792433223760_eb58d867.png"/>
+          <p:cNvPicPr>
+            <a:picLocks noChangeAspect="1"/>
+          </p:cNvPicPr>
+          <p:nvPr/>
+        </p:nvPicPr>
+        <p:blipFill>
+          <a:blip r:embed="rId2"/>
+          <a:stretch>
+            <a:fillRect/>
+          </a:stretch>
+        </p:blipFill>
+        <p:spPr>
+          <a:xfrm>
+            <a:off x="182880" y="1005840"/>
+            <a:ext cx="8778240" cy="5074920"/>
+          </a:xfrm>
+          <a:prstGeom prst="rect">
+            <a:avLst/>
+          </a:prstGeom>
+        </p:spPr>
+      </p:pic>
+      <p:sp>
+        <p:nvSpPr>
+          <p:cNvPr id="5" name="TextBox 4"/>
+          <p:cNvSpPr txBox="1"/>
+          <p:nvPr/>
+        </p:nvSpPr>
+        <p:spPr>
+          <a:xfrm>
+            <a:off x="228600" y="6172200"/>
+            <a:ext cx="8686800" cy="347472"/>
+          </a:xfrm>
+          <a:prstGeom prst="rect">
+            <a:avLst/>
+          </a:prstGeom>
+          <a:noFill/>
+        </p:spPr>
+        <p:txBody>
+          <a:bodyPr wrap="square">
+            <a:spAutoFit/>
+          </a:bodyPr>
+          <a:lstStyle/>
+          <a:p>
+            <a:pPr algn="ctr"/>
+            <a:r>
+              <a:rPr sz="1050" b="0" i="1">
+                <a:solidFill>
+                  <a:srgbClr val="1B4F8A"/>
+                </a:solidFill>
+                <a:latin typeface="Segoe UI"/>
+              </a:rPr>
+              <a:t>Critic recomputes via the same risk_engine.assess_transaction() call — no separate scorer.</a:t>
             </a:r>
           </a:p>
         </p:txBody>
@@ -4011,7 +5294,7 @@
     <p:bg>
       <p:bgPr>
         <a:solidFill>
-          <a:srgbClr val="FFFFFF"/>
+          <a:srgbClr val="FDF6E3"/>
         </a:solidFill>
         <a:effectLst/>
       </p:bgPr>
@@ -4032,15 +5315,15 @@
         <p:spPr>
           <a:xfrm>
             <a:off x="0" y="0"/>
-            <a:ext cx="12191695" cy="411480"/>
+            <a:ext cx="9144000" cy="960120"/>
           </a:xfrm>
           <a:prstGeom prst="rect">
             <a:avLst/>
           </a:prstGeom>
           <a:solidFill>
-            <a:srgbClr val="248CA0"/>
+            <a:srgbClr val="1A1A2E"/>
           </a:solidFill>
-          <a:ln>
+          <a:ln w="19050">
             <a:noFill/>
           </a:ln>
         </p:spPr>
@@ -4074,8 +5357,8 @@
         </p:nvSpPr>
         <p:spPr>
           <a:xfrm>
-            <a:off x="640080" y="640080"/>
-            <a:ext cx="6400800" cy="457200"/>
+            <a:off x="256032" y="91440"/>
+            <a:ext cx="8686800" cy="777240"/>
           </a:xfrm>
           <a:prstGeom prst="rect">
             <a:avLst/>
@@ -4083,20 +5366,20 @@
           <a:noFill/>
         </p:spPr>
         <p:txBody>
-          <a:bodyPr wrap="none">
+          <a:bodyPr wrap="square">
             <a:spAutoFit/>
           </a:bodyPr>
           <a:lstStyle/>
           <a:p>
-            <a:pPr>
-              <a:defRPr sz="2200" b="1">
-                <a:solidFill>
-                  <a:srgbClr val="122340"/>
-                </a:solidFill>
-              </a:defRPr>
-            </a:pPr>
-            <a:r>
-              <a:t>System Architecture</a:t>
+            <a:pPr algn="l"/>
+            <a:r>
+              <a:rPr sz="3000" b="1" i="0">
+                <a:solidFill>
+                  <a:srgbClr val="FDF6E3"/>
+                </a:solidFill>
+                <a:latin typeface="Caveat"/>
+              </a:rPr>
+              <a:t>The App — Streamlit Dashboard</a:t>
             </a:r>
           </a:p>
         </p:txBody>
@@ -4109,18 +5392,18 @@
         </p:nvSpPr>
         <p:spPr>
           <a:xfrm>
-            <a:off x="457200" y="1554480"/>
-            <a:ext cx="1645920" cy="1051560"/>
+            <a:off x="228600" y="1051560"/>
+            <a:ext cx="5029200" cy="4800600"/>
           </a:xfrm>
           <a:prstGeom prst="rect">
             <a:avLst/>
           </a:prstGeom>
           <a:solidFill>
-            <a:srgbClr val="2862A8"/>
+            <a:srgbClr val="161628"/>
           </a:solidFill>
-          <a:ln>
+          <a:ln w="25400">
             <a:solidFill>
-              <a:srgbClr val="2862A8"/>
+              <a:srgbClr val="C29A3C"/>
             </a:solidFill>
           </a:ln>
         </p:spPr>
@@ -4139,42 +5422,57 @@
           </a:fontRef>
         </p:style>
         <p:txBody>
-          <a:bodyPr rtlCol="0" anchor="ctr" wrap="square"/>
-          <a:lstStyle/>
-          <a:p>
-            <a:pPr algn="ctr">
-              <a:defRPr sz="1200" b="1">
-                <a:solidFill>
-                  <a:srgbClr val="FFFFFF"/>
-                </a:solidFill>
-              </a:defRPr>
-            </a:pPr>
-            <a:r>
-              <a:t>1. User / Analyst</a:t>
-            </a:r>
-          </a:p>
-        </p:txBody>
-      </p:sp>
-      <p:sp>
-        <p:nvSpPr>
-          <p:cNvPr id="5" name="Rectangle 4"/>
+          <a:bodyPr rtlCol="0" anchor="ctr"/>
+          <a:lstStyle/>
+          <a:p>
+            <a:pPr algn="ctr"/>
+          </a:p>
+        </p:txBody>
+      </p:sp>
+      <p:pic>
+        <p:nvPicPr>
+          <p:cNvPr id="5" name="Picture 4" descr="media_1792433255660_d213de77.png"/>
+          <p:cNvPicPr>
+            <a:picLocks noChangeAspect="1"/>
+          </p:cNvPicPr>
+          <p:nvPr/>
+        </p:nvPicPr>
+        <p:blipFill>
+          <a:blip r:embed="rId2"/>
+          <a:stretch>
+            <a:fillRect/>
+          </a:stretch>
+        </p:blipFill>
+        <p:spPr>
+          <a:xfrm>
+            <a:off x="256032" y="1078992"/>
+            <a:ext cx="4974336" cy="4745736"/>
+          </a:xfrm>
+          <a:prstGeom prst="rect">
+            <a:avLst/>
+          </a:prstGeom>
+        </p:spPr>
+      </p:pic>
+      <p:sp>
+        <p:nvSpPr>
+          <p:cNvPr id="6" name="Rectangle 5"/>
           <p:cNvSpPr/>
           <p:nvPr/>
         </p:nvSpPr>
         <p:spPr>
           <a:xfrm>
-            <a:off x="2377440" y="1554480"/>
-            <a:ext cx="1645920" cy="1051560"/>
+            <a:off x="5440680" y="1051560"/>
+            <a:ext cx="3474720" cy="4800600"/>
           </a:xfrm>
           <a:prstGeom prst="rect">
             <a:avLst/>
           </a:prstGeom>
           <a:solidFill>
-            <a:srgbClr val="2862A8"/>
+            <a:srgbClr val="FBEED3"/>
           </a:solidFill>
-          <a:ln>
+          <a:ln w="22860">
             <a:solidFill>
-              <a:srgbClr val="2862A8"/>
+              <a:srgbClr val="C29A3C"/>
             </a:solidFill>
           </a:ln>
         </p:spPr>
@@ -4193,566 +5491,23 @@
           </a:fontRef>
         </p:style>
         <p:txBody>
-          <a:bodyPr rtlCol="0" anchor="ctr" wrap="square"/>
-          <a:lstStyle/>
-          <a:p>
-            <a:pPr algn="ctr">
-              <a:defRPr sz="1200" b="1">
-                <a:solidFill>
-                  <a:srgbClr val="FFFFFF"/>
-                </a:solidFill>
-              </a:defRPr>
-            </a:pPr>
-            <a:r>
-              <a:t>2. Streamlit UI</a:t>
-            </a:r>
-          </a:p>
-        </p:txBody>
-      </p:sp>
-      <p:sp>
-        <p:nvSpPr>
-          <p:cNvPr id="6" name="Rectangle 5"/>
-          <p:cNvSpPr/>
-          <p:nvPr/>
-        </p:nvSpPr>
-        <p:spPr>
-          <a:xfrm>
-            <a:off x="1371600" y="2926080"/>
-            <a:ext cx="1828800" cy="1097280"/>
-          </a:xfrm>
-          <a:prstGeom prst="rect">
-            <a:avLst/>
-          </a:prstGeom>
-          <a:solidFill>
-            <a:srgbClr val="248CA0"/>
-          </a:solidFill>
-          <a:ln>
-            <a:solidFill>
-              <a:srgbClr val="248CA0"/>
-            </a:solidFill>
-          </a:ln>
-        </p:spPr>
-        <p:style>
-          <a:lnRef idx="1">
-            <a:schemeClr val="accent1"/>
-          </a:lnRef>
-          <a:fillRef idx="3">
-            <a:schemeClr val="accent1"/>
-          </a:fillRef>
-          <a:effectRef idx="2">
-            <a:schemeClr val="accent1"/>
-          </a:effectRef>
-          <a:fontRef idx="minor">
-            <a:schemeClr val="lt1"/>
-          </a:fontRef>
-        </p:style>
-        <p:txBody>
-          <a:bodyPr rtlCol="0" anchor="ctr" wrap="square"/>
-          <a:lstStyle/>
-          <a:p>
-            <a:pPr algn="ctr">
-              <a:defRPr sz="1200" b="1">
-                <a:solidFill>
-                  <a:srgbClr val="FFFFFF"/>
-                </a:solidFill>
-              </a:defRPr>
-            </a:pPr>
-            <a:r>
-              <a:t>3. Planner Agent</a:t>
-            </a:r>
-          </a:p>
-        </p:txBody>
-      </p:sp>
-      <p:sp>
-        <p:nvSpPr>
-          <p:cNvPr id="7" name="Rectangle 6"/>
-          <p:cNvSpPr/>
-          <p:nvPr/>
-        </p:nvSpPr>
-        <p:spPr>
-          <a:xfrm>
-            <a:off x="3749039" y="2926080"/>
-            <a:ext cx="1828800" cy="1097280"/>
-          </a:xfrm>
-          <a:prstGeom prst="rect">
-            <a:avLst/>
-          </a:prstGeom>
-          <a:solidFill>
-            <a:srgbClr val="248CA0"/>
-          </a:solidFill>
-          <a:ln>
-            <a:solidFill>
-              <a:srgbClr val="248CA0"/>
-            </a:solidFill>
-          </a:ln>
-        </p:spPr>
-        <p:style>
-          <a:lnRef idx="1">
-            <a:schemeClr val="accent1"/>
-          </a:lnRef>
-          <a:fillRef idx="3">
-            <a:schemeClr val="accent1"/>
-          </a:fillRef>
-          <a:effectRef idx="2">
-            <a:schemeClr val="accent1"/>
-          </a:effectRef>
-          <a:fontRef idx="minor">
-            <a:schemeClr val="lt1"/>
-          </a:fontRef>
-        </p:style>
-        <p:txBody>
-          <a:bodyPr rtlCol="0" anchor="ctr" wrap="square"/>
-          <a:lstStyle/>
-          <a:p>
-            <a:pPr algn="ctr">
-              <a:defRPr sz="1200" b="1">
-                <a:solidFill>
-                  <a:srgbClr val="FFFFFF"/>
-                </a:solidFill>
-              </a:defRPr>
-            </a:pPr>
-            <a:r>
-              <a:t>4. Research Agent</a:t>
-            </a:r>
-          </a:p>
-        </p:txBody>
-      </p:sp>
-      <p:sp>
-        <p:nvSpPr>
-          <p:cNvPr id="8" name="Rectangle 7"/>
-          <p:cNvSpPr/>
-          <p:nvPr/>
-        </p:nvSpPr>
-        <p:spPr>
-          <a:xfrm>
-            <a:off x="6217920" y="2926080"/>
-            <a:ext cx="1828800" cy="1097280"/>
-          </a:xfrm>
-          <a:prstGeom prst="rect">
-            <a:avLst/>
-          </a:prstGeom>
-          <a:solidFill>
-            <a:srgbClr val="248CA0"/>
-          </a:solidFill>
-          <a:ln>
-            <a:solidFill>
-              <a:srgbClr val="248CA0"/>
-            </a:solidFill>
-          </a:ln>
-        </p:spPr>
-        <p:style>
-          <a:lnRef idx="1">
-            <a:schemeClr val="accent1"/>
-          </a:lnRef>
-          <a:fillRef idx="3">
-            <a:schemeClr val="accent1"/>
-          </a:fillRef>
-          <a:effectRef idx="2">
-            <a:schemeClr val="accent1"/>
-          </a:effectRef>
-          <a:fontRef idx="minor">
-            <a:schemeClr val="lt1"/>
-          </a:fontRef>
-        </p:style>
-        <p:txBody>
-          <a:bodyPr rtlCol="0" anchor="ctr" wrap="square"/>
-          <a:lstStyle/>
-          <a:p>
-            <a:pPr algn="ctr">
-              <a:defRPr sz="1200" b="1">
-                <a:solidFill>
-                  <a:srgbClr val="FFFFFF"/>
-                </a:solidFill>
-              </a:defRPr>
-            </a:pPr>
-            <a:r>
-              <a:t>5. Executor Agent</a:t>
-            </a:r>
-          </a:p>
-        </p:txBody>
-      </p:sp>
-      <p:sp>
-        <p:nvSpPr>
-          <p:cNvPr id="9" name="Rectangle 8"/>
-          <p:cNvSpPr/>
-          <p:nvPr/>
-        </p:nvSpPr>
-        <p:spPr>
-          <a:xfrm>
-            <a:off x="8686800" y="2926080"/>
-            <a:ext cx="1828800" cy="1097280"/>
-          </a:xfrm>
-          <a:prstGeom prst="rect">
-            <a:avLst/>
-          </a:prstGeom>
-          <a:solidFill>
-            <a:srgbClr val="248CA0"/>
-          </a:solidFill>
-          <a:ln>
-            <a:solidFill>
-              <a:srgbClr val="248CA0"/>
-            </a:solidFill>
-          </a:ln>
-        </p:spPr>
-        <p:style>
-          <a:lnRef idx="1">
-            <a:schemeClr val="accent1"/>
-          </a:lnRef>
-          <a:fillRef idx="3">
-            <a:schemeClr val="accent1"/>
-          </a:fillRef>
-          <a:effectRef idx="2">
-            <a:schemeClr val="accent1"/>
-          </a:effectRef>
-          <a:fontRef idx="minor">
-            <a:schemeClr val="lt1"/>
-          </a:fontRef>
-        </p:style>
-        <p:txBody>
-          <a:bodyPr rtlCol="0" anchor="ctr" wrap="square"/>
-          <a:lstStyle/>
-          <a:p>
-            <a:pPr algn="ctr">
-              <a:defRPr sz="1200" b="1">
-                <a:solidFill>
-                  <a:srgbClr val="FFFFFF"/>
-                </a:solidFill>
-              </a:defRPr>
-            </a:pPr>
-            <a:r>
-              <a:t>6. Risk Engine</a:t>
-            </a:r>
-          </a:p>
-        </p:txBody>
-      </p:sp>
-      <p:sp>
-        <p:nvSpPr>
-          <p:cNvPr id="10" name="Rectangle 9"/>
-          <p:cNvSpPr/>
-          <p:nvPr/>
-        </p:nvSpPr>
-        <p:spPr>
-          <a:xfrm>
-            <a:off x="5669280" y="4754880"/>
-            <a:ext cx="1920240" cy="1097280"/>
-          </a:xfrm>
-          <a:prstGeom prst="rect">
-            <a:avLst/>
-          </a:prstGeom>
-          <a:solidFill>
-            <a:srgbClr val="2862A8"/>
-          </a:solidFill>
-          <a:ln>
-            <a:solidFill>
-              <a:srgbClr val="2862A8"/>
-            </a:solidFill>
-          </a:ln>
-        </p:spPr>
-        <p:style>
-          <a:lnRef idx="1">
-            <a:schemeClr val="accent1"/>
-          </a:lnRef>
-          <a:fillRef idx="3">
-            <a:schemeClr val="accent1"/>
-          </a:fillRef>
-          <a:effectRef idx="2">
-            <a:schemeClr val="accent1"/>
-          </a:effectRef>
-          <a:fontRef idx="minor">
-            <a:schemeClr val="lt1"/>
-          </a:fontRef>
-        </p:style>
-        <p:txBody>
-          <a:bodyPr rtlCol="0" anchor="ctr" wrap="square"/>
-          <a:lstStyle/>
-          <a:p>
-            <a:pPr algn="ctr">
-              <a:defRPr sz="1200" b="1">
-                <a:solidFill>
-                  <a:srgbClr val="FFFFFF"/>
-                </a:solidFill>
-              </a:defRPr>
-            </a:pPr>
-            <a:r>
-              <a:t>7. Critic Agent</a:t>
-            </a:r>
-          </a:p>
-        </p:txBody>
-      </p:sp>
-      <p:sp>
-        <p:nvSpPr>
-          <p:cNvPr id="11" name="Rectangle 10"/>
-          <p:cNvSpPr/>
-          <p:nvPr/>
-        </p:nvSpPr>
-        <p:spPr>
-          <a:xfrm>
-            <a:off x="8321040" y="4754880"/>
-            <a:ext cx="2560320" cy="1097280"/>
-          </a:xfrm>
-          <a:prstGeom prst="rect">
-            <a:avLst/>
-          </a:prstGeom>
-          <a:solidFill>
-            <a:srgbClr val="122340"/>
-          </a:solidFill>
-          <a:ln>
-            <a:solidFill>
-              <a:srgbClr val="122340"/>
-            </a:solidFill>
-          </a:ln>
-        </p:spPr>
-        <p:style>
-          <a:lnRef idx="1">
-            <a:schemeClr val="accent1"/>
-          </a:lnRef>
-          <a:fillRef idx="3">
-            <a:schemeClr val="accent1"/>
-          </a:fillRef>
-          <a:effectRef idx="2">
-            <a:schemeClr val="accent1"/>
-          </a:effectRef>
-          <a:fontRef idx="minor">
-            <a:schemeClr val="lt1"/>
-          </a:fontRef>
-        </p:style>
-        <p:txBody>
-          <a:bodyPr rtlCol="0" anchor="ctr" wrap="square"/>
-          <a:lstStyle/>
-          <a:p>
-            <a:pPr algn="ctr">
-              <a:defRPr sz="1200" b="1">
-                <a:solidFill>
-                  <a:srgbClr val="FFFFFF"/>
-                </a:solidFill>
-              </a:defRPr>
-            </a:pPr>
-            <a:r>
-              <a:t>8. Manual Review / Report</a:t>
-            </a:r>
-          </a:p>
-        </p:txBody>
-      </p:sp>
-      <p:cxnSp>
-        <p:nvCxnSpPr>
-          <p:cNvPr id="12" name="Connector 11"/>
-          <p:cNvCxnSpPr/>
-          <p:nvPr/>
-        </p:nvCxnSpPr>
-        <p:spPr>
-          <a:xfrm>
-            <a:off x="1645920" y="2148840"/>
-            <a:ext cx="731520" cy="0"/>
-          </a:xfrm>
-          <a:prstGeom prst="line">
-            <a:avLst/>
-          </a:prstGeom>
-          <a:ln w="25400">
-            <a:solidFill>
-              <a:srgbClr val="2D4052"/>
-            </a:solidFill>
-          </a:ln>
-        </p:spPr>
-        <p:style>
-          <a:lnRef idx="2">
-            <a:schemeClr val="accent1"/>
-          </a:lnRef>
-          <a:fillRef idx="0">
-            <a:schemeClr val="accent1"/>
-          </a:fillRef>
-          <a:effectRef idx="1">
-            <a:schemeClr val="accent1"/>
-          </a:effectRef>
-          <a:fontRef idx="minor">
-            <a:schemeClr val="tx1"/>
-          </a:fontRef>
-        </p:style>
-      </p:cxnSp>
-      <p:cxnSp>
-        <p:nvCxnSpPr>
-          <p:cNvPr id="13" name="Connector 12"/>
-          <p:cNvCxnSpPr/>
-          <p:nvPr/>
-        </p:nvCxnSpPr>
-        <p:spPr>
-          <a:xfrm>
-            <a:off x="3200400" y="2148840"/>
-            <a:ext cx="0" cy="777240"/>
-          </a:xfrm>
-          <a:prstGeom prst="line">
-            <a:avLst/>
-          </a:prstGeom>
-          <a:ln w="25400">
-            <a:solidFill>
-              <a:srgbClr val="2D4052"/>
-            </a:solidFill>
-          </a:ln>
-        </p:spPr>
-        <p:style>
-          <a:lnRef idx="2">
-            <a:schemeClr val="accent1"/>
-          </a:lnRef>
-          <a:fillRef idx="0">
-            <a:schemeClr val="accent1"/>
-          </a:fillRef>
-          <a:effectRef idx="1">
-            <a:schemeClr val="accent1"/>
-          </a:effectRef>
-          <a:fontRef idx="minor">
-            <a:schemeClr val="tx1"/>
-          </a:fontRef>
-        </p:style>
-      </p:cxnSp>
-      <p:cxnSp>
-        <p:nvCxnSpPr>
-          <p:cNvPr id="14" name="Connector 13"/>
-          <p:cNvCxnSpPr/>
-          <p:nvPr/>
-        </p:nvCxnSpPr>
-        <p:spPr>
-          <a:xfrm>
-            <a:off x="4937760" y="3474720"/>
-            <a:ext cx="1280160" cy="0"/>
-          </a:xfrm>
-          <a:prstGeom prst="line">
-            <a:avLst/>
-          </a:prstGeom>
-          <a:ln w="25400">
-            <a:solidFill>
-              <a:srgbClr val="2D4052"/>
-            </a:solidFill>
-          </a:ln>
-        </p:spPr>
-        <p:style>
-          <a:lnRef idx="2">
-            <a:schemeClr val="accent1"/>
-          </a:lnRef>
-          <a:fillRef idx="0">
-            <a:schemeClr val="accent1"/>
-          </a:fillRef>
-          <a:effectRef idx="1">
-            <a:schemeClr val="accent1"/>
-          </a:effectRef>
-          <a:fontRef idx="minor">
-            <a:schemeClr val="tx1"/>
-          </a:fontRef>
-        </p:style>
-      </p:cxnSp>
-      <p:cxnSp>
-        <p:nvCxnSpPr>
-          <p:cNvPr id="15" name="Connector 14"/>
-          <p:cNvCxnSpPr/>
-          <p:nvPr/>
-        </p:nvCxnSpPr>
-        <p:spPr>
-          <a:xfrm>
-            <a:off x="8046720" y="3474720"/>
-            <a:ext cx="640080" cy="0"/>
-          </a:xfrm>
-          <a:prstGeom prst="line">
-            <a:avLst/>
-          </a:prstGeom>
-          <a:ln w="25400">
-            <a:solidFill>
-              <a:srgbClr val="2D4052"/>
-            </a:solidFill>
-          </a:ln>
-        </p:spPr>
-        <p:style>
-          <a:lnRef idx="2">
-            <a:schemeClr val="accent1"/>
-          </a:lnRef>
-          <a:fillRef idx="0">
-            <a:schemeClr val="accent1"/>
-          </a:fillRef>
-          <a:effectRef idx="1">
-            <a:schemeClr val="accent1"/>
-          </a:effectRef>
-          <a:fontRef idx="minor">
-            <a:schemeClr val="tx1"/>
-          </a:fontRef>
-        </p:style>
-      </p:cxnSp>
-      <p:cxnSp>
-        <p:nvCxnSpPr>
-          <p:cNvPr id="16" name="Connector 15"/>
-          <p:cNvCxnSpPr/>
-          <p:nvPr/>
-        </p:nvCxnSpPr>
-        <p:spPr>
-          <a:xfrm>
-            <a:off x="9601200" y="4023360"/>
-            <a:ext cx="0" cy="731520"/>
-          </a:xfrm>
-          <a:prstGeom prst="line">
-            <a:avLst/>
-          </a:prstGeom>
-          <a:ln w="25400">
-            <a:solidFill>
-              <a:srgbClr val="2D4052"/>
-            </a:solidFill>
-          </a:ln>
-        </p:spPr>
-        <p:style>
-          <a:lnRef idx="2">
-            <a:schemeClr val="accent1"/>
-          </a:lnRef>
-          <a:fillRef idx="0">
-            <a:schemeClr val="accent1"/>
-          </a:fillRef>
-          <a:effectRef idx="1">
-            <a:schemeClr val="accent1"/>
-          </a:effectRef>
-          <a:fontRef idx="minor">
-            <a:schemeClr val="tx1"/>
-          </a:fontRef>
-        </p:style>
-      </p:cxnSp>
-      <p:cxnSp>
-        <p:nvCxnSpPr>
-          <p:cNvPr id="17" name="Connector 16"/>
-          <p:cNvCxnSpPr/>
-          <p:nvPr/>
-        </p:nvCxnSpPr>
-        <p:spPr>
-          <a:xfrm>
-            <a:off x="7589520" y="5303520"/>
-            <a:ext cx="731520" cy="0"/>
-          </a:xfrm>
-          <a:prstGeom prst="line">
-            <a:avLst/>
-          </a:prstGeom>
-          <a:ln w="25400">
-            <a:solidFill>
-              <a:srgbClr val="2D4052"/>
-            </a:solidFill>
-          </a:ln>
-        </p:spPr>
-        <p:style>
-          <a:lnRef idx="2">
-            <a:schemeClr val="accent1"/>
-          </a:lnRef>
-          <a:fillRef idx="0">
-            <a:schemeClr val="accent1"/>
-          </a:fillRef>
-          <a:effectRef idx="1">
-            <a:schemeClr val="accent1"/>
-          </a:effectRef>
-          <a:fontRef idx="minor">
-            <a:schemeClr val="tx1"/>
-          </a:fontRef>
-        </p:style>
-      </p:cxnSp>
-      <p:sp>
-        <p:nvSpPr>
-          <p:cNvPr id="18" name="TextBox 17"/>
+          <a:bodyPr rtlCol="0" anchor="ctr"/>
+          <a:lstStyle/>
+          <a:p>
+            <a:pPr algn="ctr"/>
+          </a:p>
+        </p:txBody>
+      </p:sp>
+      <p:sp>
+        <p:nvSpPr>
+          <p:cNvPr id="7" name="TextBox 6"/>
           <p:cNvSpPr txBox="1"/>
           <p:nvPr/>
         </p:nvSpPr>
         <p:spPr>
           <a:xfrm>
-            <a:off x="457200" y="6126480"/>
-            <a:ext cx="10058400" cy="548640"/>
+            <a:off x="5577840" y="1124712"/>
+            <a:ext cx="3200400" cy="438912"/>
           </a:xfrm>
           <a:prstGeom prst="rect">
             <a:avLst/>
@@ -4760,20 +5515,302 @@
           <a:noFill/>
         </p:spPr>
         <p:txBody>
-          <a:bodyPr wrap="none">
+          <a:bodyPr wrap="square">
             <a:spAutoFit/>
           </a:bodyPr>
           <a:lstStyle/>
           <a:p>
-            <a:pPr>
-              <a:defRPr sz="1400">
-                <a:solidFill>
-                  <a:srgbClr val="1E1E1E"/>
-                </a:solidFill>
-              </a:defRPr>
-            </a:pPr>
-            <a:r>
-              <a:t>Planner → Research → Executor → Critic creates a fail-closed investigation flow for analyst review.</a:t>
+            <a:pPr algn="l"/>
+            <a:r>
+              <a:rPr sz="1800" b="1" i="0">
+                <a:solidFill>
+                  <a:srgbClr val="D95F1A"/>
+                </a:solidFill>
+                <a:latin typeface="Caveat"/>
+              </a:rPr>
+              <a:t>Five scoring rules</a:t>
+            </a:r>
+          </a:p>
+        </p:txBody>
+      </p:sp>
+      <p:sp>
+        <p:nvSpPr>
+          <p:cNvPr id="8" name="TextBox 7"/>
+          <p:cNvSpPr txBox="1"/>
+          <p:nvPr/>
+        </p:nvSpPr>
+        <p:spPr>
+          <a:xfrm>
+            <a:off x="5577840" y="1600200"/>
+            <a:ext cx="3291840" cy="4023360"/>
+          </a:xfrm>
+          <a:prstGeom prst="rect">
+            <a:avLst/>
+          </a:prstGeom>
+          <a:noFill/>
+        </p:spPr>
+        <p:txBody>
+          <a:bodyPr wrap="square">
+            <a:spAutoFit/>
+          </a:bodyPr>
+          <a:lstStyle/>
+          <a:p>
+            <a:pPr>
+              <a:spcBef>
+                <a:spcPts val="500"/>
+              </a:spcBef>
+            </a:pPr>
+            <a:r>
+              <a:rPr sz="1250" b="0" i="0">
+                <a:solidFill>
+                  <a:srgbClr val="1C170E"/>
+                </a:solidFill>
+                <a:latin typeface="Courier New"/>
+              </a:rPr>
+              <a:t>Amount &gt; INR 50,000        25 pts</a:t>
+            </a:r>
+          </a:p>
+          <a:p>
+            <a:pPr>
+              <a:spcBef>
+                <a:spcPts val="500"/>
+              </a:spcBef>
+            </a:pPr>
+            <a:r>
+              <a:rPr sz="1250" b="0" i="0">
+                <a:solidFill>
+                  <a:srgbClr val="1C170E"/>
+                </a:solidFill>
+                <a:latin typeface="Courier New"/>
+              </a:rPr>
+              <a:t>New location flag              20 pts</a:t>
+            </a:r>
+          </a:p>
+          <a:p>
+            <a:pPr>
+              <a:spcBef>
+                <a:spcPts val="500"/>
+              </a:spcBef>
+            </a:pPr>
+            <a:r>
+              <a:rPr sz="1250" b="0" i="0">
+                <a:solidFill>
+                  <a:srgbClr val="1C170E"/>
+                </a:solidFill>
+                <a:latin typeface="Courier New"/>
+              </a:rPr>
+              <a:t>4+ txns in 10 minutes      25 pts</a:t>
+            </a:r>
+          </a:p>
+          <a:p>
+            <a:pPr>
+              <a:spcBef>
+                <a:spcPts val="500"/>
+              </a:spcBef>
+            </a:pPr>
+            <a:r>
+              <a:rPr sz="1250" b="0" i="0">
+                <a:solidFill>
+                  <a:srgbClr val="1C170E"/>
+                </a:solidFill>
+                <a:latin typeface="Courier New"/>
+              </a:rPr>
+              <a:t>New beneficiary flag         15 pts</a:t>
+            </a:r>
+          </a:p>
+          <a:p>
+            <a:pPr>
+              <a:spcBef>
+                <a:spcPts val="500"/>
+              </a:spcBef>
+            </a:pPr>
+            <a:r>
+              <a:rPr sz="1250" b="0" i="0">
+                <a:solidFill>
+                  <a:srgbClr val="1C170E"/>
+                </a:solidFill>
+                <a:latin typeface="Courier New"/>
+              </a:rPr>
+              <a:t>Outside usual hours          15 pts</a:t>
+            </a:r>
+          </a:p>
+          <a:p>
+            <a:pPr>
+              <a:spcBef>
+                <a:spcPts val="500"/>
+              </a:spcBef>
+            </a:pPr>
+            <a:r>
+              <a:rPr sz="1250" b="0" i="0">
+                <a:solidFill>
+                  <a:srgbClr val="1C170E"/>
+                </a:solidFill>
+                <a:latin typeface="Courier New"/>
+              </a:rPr>
+              <a:t/>
+            </a:r>
+          </a:p>
+          <a:p>
+            <a:pPr>
+              <a:spcBef>
+                <a:spcPts val="500"/>
+              </a:spcBef>
+            </a:pPr>
+            <a:r>
+              <a:rPr sz="1250" b="0" i="0">
+                <a:solidFill>
+                  <a:srgbClr val="1C170E"/>
+                </a:solidFill>
+                <a:latin typeface="Courier New"/>
+              </a:rPr>
+              <a:t>Scores cap at 100.</a:t>
+            </a:r>
+          </a:p>
+          <a:p>
+            <a:pPr>
+              <a:spcBef>
+                <a:spcPts val="500"/>
+              </a:spcBef>
+            </a:pPr>
+            <a:r>
+              <a:rPr sz="1250" b="0" i="0">
+                <a:solidFill>
+                  <a:srgbClr val="1C170E"/>
+                </a:solidFill>
+                <a:latin typeface="Courier New"/>
+              </a:rPr>
+              <a:t>Low: 0–29  /  Medium: 30–59</a:t>
+            </a:r>
+          </a:p>
+          <a:p>
+            <a:pPr>
+              <a:spcBef>
+                <a:spcPts val="500"/>
+              </a:spcBef>
+            </a:pPr>
+            <a:r>
+              <a:rPr sz="1250" b="0" i="0">
+                <a:solidFill>
+                  <a:srgbClr val="1C170E"/>
+                </a:solidFill>
+                <a:latin typeface="Courier New"/>
+              </a:rPr>
+              <a:t>High: 60–100</a:t>
+            </a:r>
+          </a:p>
+          <a:p>
+            <a:pPr>
+              <a:spcBef>
+                <a:spcPts val="500"/>
+              </a:spcBef>
+            </a:pPr>
+            <a:r>
+              <a:rPr sz="1250" b="0" i="0">
+                <a:solidFill>
+                  <a:srgbClr val="1C170E"/>
+                </a:solidFill>
+                <a:latin typeface="Courier New"/>
+              </a:rPr>
+              <a:t/>
+            </a:r>
+          </a:p>
+          <a:p>
+            <a:pPr>
+              <a:spcBef>
+                <a:spcPts val="500"/>
+              </a:spcBef>
+            </a:pPr>
+            <a:r>
+              <a:rPr sz="1250" b="0" i="0">
+                <a:solidFill>
+                  <a:srgbClr val="1C170E"/>
+                </a:solidFill>
+                <a:latin typeface="Courier New"/>
+              </a:rPr>
+              <a:t>Each flag that fires is listed in</a:t>
+            </a:r>
+          </a:p>
+          <a:p>
+            <a:pPr>
+              <a:spcBef>
+                <a:spcPts val="500"/>
+              </a:spcBef>
+            </a:pPr>
+            <a:r>
+              <a:rPr sz="1250" b="0" i="0">
+                <a:solidFill>
+                  <a:srgbClr val="1C170E"/>
+                </a:solidFill>
+                <a:latin typeface="Courier New"/>
+              </a:rPr>
+              <a:t>the final report with its point value</a:t>
+            </a:r>
+          </a:p>
+          <a:p>
+            <a:pPr>
+              <a:spcBef>
+                <a:spcPts val="500"/>
+              </a:spcBef>
+            </a:pPr>
+            <a:r>
+              <a:rPr sz="1250" b="0" i="0">
+                <a:solidFill>
+                  <a:srgbClr val="1C170E"/>
+                </a:solidFill>
+                <a:latin typeface="Courier New"/>
+              </a:rPr>
+              <a:t>so the analyst knows exactly why</a:t>
+            </a:r>
+          </a:p>
+          <a:p>
+            <a:pPr>
+              <a:spcBef>
+                <a:spcPts val="500"/>
+              </a:spcBef>
+            </a:pPr>
+            <a:r>
+              <a:rPr sz="1250" b="0" i="0">
+                <a:solidFill>
+                  <a:srgbClr val="1C170E"/>
+                </a:solidFill>
+                <a:latin typeface="Courier New"/>
+              </a:rPr>
+              <a:t>a transaction was escalated.</a:t>
+            </a:r>
+          </a:p>
+        </p:txBody>
+      </p:sp>
+      <p:sp>
+        <p:nvSpPr>
+          <p:cNvPr id="9" name="TextBox 8"/>
+          <p:cNvSpPr txBox="1"/>
+          <p:nvPr/>
+        </p:nvSpPr>
+        <p:spPr>
+          <a:xfrm>
+            <a:off x="228600" y="5943600"/>
+            <a:ext cx="8686800" cy="347472"/>
+          </a:xfrm>
+          <a:prstGeom prst="rect">
+            <a:avLst/>
+          </a:prstGeom>
+          <a:noFill/>
+        </p:spPr>
+        <p:txBody>
+          <a:bodyPr wrap="square">
+            <a:spAutoFit/>
+          </a:bodyPr>
+          <a:lstStyle/>
+          <a:p>
+            <a:pPr algn="ctr"/>
+            <a:r>
+              <a:rPr sz="1050" b="0" i="1">
+                <a:solidFill>
+                  <a:srgbClr val="8B1A1A"/>
+                </a:solidFill>
+                <a:latin typeface="Segoe UI"/>
+              </a:rPr>
+              <a:t>Weights are illustrative — not calibrated against verified fraud outcomes.</a:t>
             </a:r>
           </a:p>
         </p:txBody>
@@ -4792,7 +5829,7 @@
     <p:bg>
       <p:bgPr>
         <a:solidFill>
-          <a:srgbClr val="FFFFFF"/>
+          <a:srgbClr val="FDF6E3"/>
         </a:solidFill>
         <a:effectLst/>
       </p:bgPr>
@@ -4813,15 +5850,15 @@
         <p:spPr>
           <a:xfrm>
             <a:off x="0" y="0"/>
-            <a:ext cx="12191695" cy="411480"/>
+            <a:ext cx="9144000" cy="960120"/>
           </a:xfrm>
           <a:prstGeom prst="rect">
             <a:avLst/>
           </a:prstGeom>
           <a:solidFill>
-            <a:srgbClr val="2862A8"/>
+            <a:srgbClr val="2E6E38"/>
           </a:solidFill>
-          <a:ln>
+          <a:ln w="19050">
             <a:noFill/>
           </a:ln>
         </p:spPr>
@@ -4855,43 +5892,8 @@
         </p:nvSpPr>
         <p:spPr>
           <a:xfrm>
-            <a:off x="640080" y="685800"/>
-            <a:ext cx="9601200" cy="640080"/>
-          </a:xfrm>
-          <a:prstGeom prst="rect">
-            <a:avLst/>
-          </a:prstGeom>
-          <a:noFill/>
-        </p:spPr>
-        <p:txBody>
-          <a:bodyPr wrap="none">
-            <a:spAutoFit/>
-          </a:bodyPr>
-          <a:lstStyle/>
-          <a:p>
-            <a:pPr>
-              <a:defRPr sz="2400" b="1">
-                <a:solidFill>
-                  <a:srgbClr val="122340"/>
-                </a:solidFill>
-              </a:defRPr>
-            </a:pPr>
-            <a:r>
-              <a:t>Demo Workflow and Output</a:t>
-            </a:r>
-          </a:p>
-        </p:txBody>
-      </p:sp>
-      <p:sp>
-        <p:nvSpPr>
-          <p:cNvPr id="4" name="TextBox 3"/>
-          <p:cNvSpPr txBox="1"/>
-          <p:nvPr/>
-        </p:nvSpPr>
-        <p:spPr>
-          <a:xfrm>
-            <a:off x="731520" y="1463040"/>
-            <a:ext cx="10241280" cy="4389120"/>
+            <a:off x="256032" y="91440"/>
+            <a:ext cx="8686800" cy="777240"/>
           </a:xfrm>
           <a:prstGeom prst="rect">
             <a:avLst/>
@@ -4904,63 +5906,656 @@
           </a:bodyPr>
           <a:lstStyle/>
           <a:p>
-            <a:pPr>
-              <a:spcAft>
-                <a:spcPts val="1000"/>
-              </a:spcAft>
-              <a:defRPr sz="2000">
-                <a:solidFill>
-                  <a:srgbClr val="1E1E1E"/>
-                </a:solidFill>
-              </a:defRPr>
-            </a:pPr>
-            <a:r>
-              <a:t>Upload CSV data or use the bundled synthetic transaction dataset.</a:t>
-            </a:r>
-          </a:p>
-          <a:p>
-            <a:pPr>
-              <a:spcAft>
-                <a:spcPts val="1000"/>
-              </a:spcAft>
-              <a:defRPr sz="2000">
-                <a:solidFill>
-                  <a:srgbClr val="1E1E1E"/>
-                </a:solidFill>
-              </a:defRPr>
-            </a:pPr>
-            <a:r>
-              <a:t>Map columns to the canonical FinGuard fields.</a:t>
-            </a:r>
-          </a:p>
-          <a:p>
-            <a:pPr>
-              <a:spcAft>
-                <a:spcPts val="1000"/>
-              </a:spcAft>
-              <a:defRPr sz="2000">
-                <a:solidFill>
-                  <a:srgbClr val="1E1E1E"/>
-                </a:solidFill>
-              </a:defRPr>
-            </a:pPr>
-            <a:r>
-              <a:t>Select a transaction and run the investigation.</a:t>
-            </a:r>
-          </a:p>
-          <a:p>
-            <a:pPr>
-              <a:spcAft>
-                <a:spcPts val="1000"/>
-              </a:spcAft>
-              <a:defRPr sz="2000">
-                <a:solidFill>
-                  <a:srgbClr val="1E1E1E"/>
-                </a:solidFill>
-              </a:defRPr>
-            </a:pPr>
-            <a:r>
-              <a:t>View the risk score, classification, evidence table, trace of all agents, and download the JSON report.</a:t>
+            <a:pPr algn="l"/>
+            <a:r>
+              <a:rPr sz="3000" b="1" i="0">
+                <a:solidFill>
+                  <a:srgbClr val="FDF6E3"/>
+                </a:solidFill>
+                <a:latin typeface="Caveat"/>
+              </a:rPr>
+              <a:t>Results &amp; Evaluation</a:t>
+            </a:r>
+          </a:p>
+        </p:txBody>
+      </p:sp>
+      <p:pic>
+        <p:nvPicPr>
+          <p:cNvPr id="4" name="Picture 3" descr="results_chart.png"/>
+          <p:cNvPicPr>
+            <a:picLocks noChangeAspect="1"/>
+          </p:cNvPicPr>
+          <p:nvPr/>
+        </p:nvPicPr>
+        <p:blipFill>
+          <a:blip r:embed="rId2"/>
+          <a:stretch>
+            <a:fillRect/>
+          </a:stretch>
+        </p:blipFill>
+        <p:spPr>
+          <a:xfrm>
+            <a:off x="182880" y="1051560"/>
+            <a:ext cx="5074920" cy="3291840"/>
+          </a:xfrm>
+          <a:prstGeom prst="rect">
+            <a:avLst/>
+          </a:prstGeom>
+        </p:spPr>
+      </p:pic>
+      <p:sp>
+        <p:nvSpPr>
+          <p:cNvPr id="5" name="Rectangle 4"/>
+          <p:cNvSpPr/>
+          <p:nvPr/>
+        </p:nvSpPr>
+        <p:spPr>
+          <a:xfrm>
+            <a:off x="5440680" y="1051560"/>
+            <a:ext cx="3474720" cy="3291840"/>
+          </a:xfrm>
+          <a:prstGeom prst="rect">
+            <a:avLst/>
+          </a:prstGeom>
+          <a:solidFill>
+            <a:srgbClr val="FBEED3"/>
+          </a:solidFill>
+          <a:ln w="22860">
+            <a:solidFill>
+              <a:srgbClr val="C29A3C"/>
+            </a:solidFill>
+          </a:ln>
+        </p:spPr>
+        <p:style>
+          <a:lnRef idx="1">
+            <a:schemeClr val="accent1"/>
+          </a:lnRef>
+          <a:fillRef idx="3">
+            <a:schemeClr val="accent1"/>
+          </a:fillRef>
+          <a:effectRef idx="2">
+            <a:schemeClr val="accent1"/>
+          </a:effectRef>
+          <a:fontRef idx="minor">
+            <a:schemeClr val="lt1"/>
+          </a:fontRef>
+        </p:style>
+        <p:txBody>
+          <a:bodyPr rtlCol="0" anchor="ctr"/>
+          <a:lstStyle/>
+          <a:p>
+            <a:pPr algn="ctr"/>
+          </a:p>
+        </p:txBody>
+      </p:sp>
+      <p:sp>
+        <p:nvSpPr>
+          <p:cNvPr id="6" name="TextBox 5"/>
+          <p:cNvSpPr txBox="1"/>
+          <p:nvPr/>
+        </p:nvSpPr>
+        <p:spPr>
+          <a:xfrm>
+            <a:off x="5577840" y="1124712"/>
+            <a:ext cx="3200400" cy="411480"/>
+          </a:xfrm>
+          <a:prstGeom prst="rect">
+            <a:avLst/>
+          </a:prstGeom>
+          <a:noFill/>
+        </p:spPr>
+        <p:txBody>
+          <a:bodyPr wrap="square">
+            <a:spAutoFit/>
+          </a:bodyPr>
+          <a:lstStyle/>
+          <a:p>
+            <a:pPr algn="l"/>
+            <a:r>
+              <a:rPr sz="1800" b="1" i="0">
+                <a:solidFill>
+                  <a:srgbClr val="2E6E38"/>
+                </a:solidFill>
+                <a:latin typeface="Caveat"/>
+              </a:rPr>
+              <a:t>Run summary</a:t>
+            </a:r>
+          </a:p>
+        </p:txBody>
+      </p:sp>
+      <p:sp>
+        <p:nvSpPr>
+          <p:cNvPr id="7" name="TextBox 6"/>
+          <p:cNvSpPr txBox="1"/>
+          <p:nvPr/>
+        </p:nvSpPr>
+        <p:spPr>
+          <a:xfrm>
+            <a:off x="5577840" y="1572768"/>
+            <a:ext cx="3291840" cy="2651760"/>
+          </a:xfrm>
+          <a:prstGeom prst="rect">
+            <a:avLst/>
+          </a:prstGeom>
+          <a:noFill/>
+        </p:spPr>
+        <p:txBody>
+          <a:bodyPr wrap="square">
+            <a:spAutoFit/>
+          </a:bodyPr>
+          <a:lstStyle/>
+          <a:p>
+            <a:pPr>
+              <a:spcBef>
+                <a:spcPts val="300"/>
+              </a:spcBef>
+            </a:pPr>
+            <a:r>
+              <a:rPr sz="1200" b="0" i="0">
+                <a:solidFill>
+                  <a:srgbClr val="1C170E"/>
+                </a:solidFill>
+                <a:latin typeface="Courier New"/>
+              </a:rPr>
+              <a:t>Dataset      data/transactions.csv</a:t>
+            </a:r>
+          </a:p>
+          <a:p>
+            <a:pPr>
+              <a:spcBef>
+                <a:spcPts val="300"/>
+              </a:spcBef>
+            </a:pPr>
+            <a:r>
+              <a:rPr sz="1200" b="0" i="0">
+                <a:solidFill>
+                  <a:srgbClr val="1C170E"/>
+                </a:solidFill>
+                <a:latin typeface="Courier New"/>
+              </a:rPr>
+              <a:t>Records      500 synthetic rows</a:t>
+            </a:r>
+          </a:p>
+          <a:p>
+            <a:pPr>
+              <a:spcBef>
+                <a:spcPts val="300"/>
+              </a:spcBef>
+            </a:pPr>
+            <a:r>
+              <a:rPr sz="1200" b="0" i="0">
+                <a:solidFill>
+                  <a:srgbClr val="1C170E"/>
+                </a:solidFill>
+                <a:latin typeface="Courier New"/>
+              </a:rPr>
+              <a:t>Pipeline     Planner &gt; Research</a:t>
+            </a:r>
+          </a:p>
+          <a:p>
+            <a:pPr>
+              <a:spcBef>
+                <a:spcPts val="300"/>
+              </a:spcBef>
+            </a:pPr>
+            <a:r>
+              <a:rPr sz="1200" b="0" i="0">
+                <a:solidFill>
+                  <a:srgbClr val="1C170E"/>
+                </a:solidFill>
+                <a:latin typeface="Courier New"/>
+              </a:rPr>
+              <a:t>              &gt; Executor &gt; Critic</a:t>
+            </a:r>
+          </a:p>
+          <a:p>
+            <a:pPr>
+              <a:spcBef>
+                <a:spcPts val="300"/>
+              </a:spcBef>
+            </a:pPr>
+            <a:r>
+              <a:rPr sz="1200" b="0" i="0">
+                <a:solidFill>
+                  <a:srgbClr val="1C170E"/>
+                </a:solidFill>
+                <a:latin typeface="Courier New"/>
+              </a:rPr>
+              <a:t/>
+            </a:r>
+          </a:p>
+          <a:p>
+            <a:pPr>
+              <a:spcBef>
+                <a:spcPts val="300"/>
+              </a:spcBef>
+            </a:pPr>
+            <a:r>
+              <a:rPr sz="1200" b="0" i="0">
+                <a:solidFill>
+                  <a:srgbClr val="1C170E"/>
+                </a:solidFill>
+                <a:latin typeface="Courier New"/>
+              </a:rPr>
+              <a:t>Low tier      448 txns   89.6%</a:t>
+            </a:r>
+          </a:p>
+          <a:p>
+            <a:pPr>
+              <a:spcBef>
+                <a:spcPts val="300"/>
+              </a:spcBef>
+            </a:pPr>
+            <a:r>
+              <a:rPr sz="1200" b="0" i="0">
+                <a:solidFill>
+                  <a:srgbClr val="1C170E"/>
+                </a:solidFill>
+                <a:latin typeface="Courier New"/>
+              </a:rPr>
+              <a:t>Medium        48 txns    9.6%</a:t>
+            </a:r>
+          </a:p>
+          <a:p>
+            <a:pPr>
+              <a:spcBef>
+                <a:spcPts val="300"/>
+              </a:spcBef>
+            </a:pPr>
+            <a:r>
+              <a:rPr sz="1200" b="0" i="0">
+                <a:solidFill>
+                  <a:srgbClr val="1C170E"/>
+                </a:solidFill>
+                <a:latin typeface="Courier New"/>
+              </a:rPr>
+              <a:t>High            4 txns     0.8%</a:t>
+            </a:r>
+          </a:p>
+          <a:p>
+            <a:pPr>
+              <a:spcBef>
+                <a:spcPts val="300"/>
+              </a:spcBef>
+            </a:pPr>
+            <a:r>
+              <a:rPr sz="1200" b="0" i="0">
+                <a:solidFill>
+                  <a:srgbClr val="1C170E"/>
+                </a:solidFill>
+                <a:latin typeface="Courier New"/>
+              </a:rPr>
+              <a:t/>
+            </a:r>
+          </a:p>
+          <a:p>
+            <a:pPr>
+              <a:spcBef>
+                <a:spcPts val="300"/>
+              </a:spcBef>
+            </a:pPr>
+            <a:r>
+              <a:rPr sz="1200" b="0" i="0">
+                <a:solidFill>
+                  <a:srgbClr val="1C170E"/>
+                </a:solidFill>
+                <a:latin typeface="Courier New"/>
+              </a:rPr>
+              <a:t>Mean score   11.15 / 100</a:t>
+            </a:r>
+          </a:p>
+          <a:p>
+            <a:pPr>
+              <a:spcBef>
+                <a:spcPts val="300"/>
+              </a:spcBef>
+            </a:pPr>
+            <a:r>
+              <a:rPr sz="1200" b="0" i="0">
+                <a:solidFill>
+                  <a:srgbClr val="1C170E"/>
+                </a:solidFill>
+                <a:latin typeface="Courier New"/>
+              </a:rPr>
+              <a:t>Critic pass   500 / 500  (100%)</a:t>
+            </a:r>
+          </a:p>
+          <a:p>
+            <a:pPr>
+              <a:spcBef>
+                <a:spcPts val="300"/>
+              </a:spcBef>
+            </a:pPr>
+            <a:r>
+              <a:rPr sz="1200" b="0" i="0">
+                <a:solidFill>
+                  <a:srgbClr val="1C170E"/>
+                </a:solidFill>
+                <a:latin typeface="Courier New"/>
+              </a:rPr>
+              <a:t>Unit tests    17 passed</a:t>
+            </a:r>
+          </a:p>
+        </p:txBody>
+      </p:sp>
+      <p:sp>
+        <p:nvSpPr>
+          <p:cNvPr id="8" name="Rectangle 7"/>
+          <p:cNvSpPr/>
+          <p:nvPr/>
+        </p:nvSpPr>
+        <p:spPr>
+          <a:xfrm>
+            <a:off x="182880" y="4480560"/>
+            <a:ext cx="8778240" cy="347472"/>
+          </a:xfrm>
+          <a:prstGeom prst="rect">
+            <a:avLst/>
+          </a:prstGeom>
+          <a:solidFill>
+            <a:srgbClr val="1C170E"/>
+          </a:solidFill>
+          <a:ln w="19050">
+            <a:noFill/>
+          </a:ln>
+        </p:spPr>
+        <p:style>
+          <a:lnRef idx="1">
+            <a:schemeClr val="accent1"/>
+          </a:lnRef>
+          <a:fillRef idx="3">
+            <a:schemeClr val="accent1"/>
+          </a:fillRef>
+          <a:effectRef idx="2">
+            <a:schemeClr val="accent1"/>
+          </a:effectRef>
+          <a:fontRef idx="minor">
+            <a:schemeClr val="lt1"/>
+          </a:fontRef>
+        </p:style>
+        <p:txBody>
+          <a:bodyPr rtlCol="0" anchor="ctr"/>
+          <a:lstStyle/>
+          <a:p>
+            <a:pPr algn="ctr"/>
+          </a:p>
+        </p:txBody>
+      </p:sp>
+      <p:sp>
+        <p:nvSpPr>
+          <p:cNvPr id="9" name="TextBox 8"/>
+          <p:cNvSpPr txBox="1"/>
+          <p:nvPr/>
+        </p:nvSpPr>
+        <p:spPr>
+          <a:xfrm>
+            <a:off x="320040" y="4498848"/>
+            <a:ext cx="8503920" cy="320040"/>
+          </a:xfrm>
+          <a:prstGeom prst="rect">
+            <a:avLst/>
+          </a:prstGeom>
+          <a:noFill/>
+        </p:spPr>
+        <p:txBody>
+          <a:bodyPr wrap="square">
+            <a:spAutoFit/>
+          </a:bodyPr>
+          <a:lstStyle/>
+          <a:p>
+            <a:pPr>
+              <a:spcBef>
+                <a:spcPts val="500"/>
+              </a:spcBef>
+            </a:pPr>
+            <a:r>
+              <a:rPr sz="1150" b="1" i="0">
+                <a:solidFill>
+                  <a:srgbClr val="FDF6E3"/>
+                </a:solidFill>
+                <a:latin typeface="Courier New"/>
+              </a:rPr>
+              <a:t>Transaction    Score    Tier              Triggered rules</a:t>
+            </a:r>
+          </a:p>
+        </p:txBody>
+      </p:sp>
+      <p:sp>
+        <p:nvSpPr>
+          <p:cNvPr id="10" name="Rectangle 9"/>
+          <p:cNvSpPr/>
+          <p:nvPr/>
+        </p:nvSpPr>
+        <p:spPr>
+          <a:xfrm>
+            <a:off x="182880" y="4846320"/>
+            <a:ext cx="8778240" cy="457200"/>
+          </a:xfrm>
+          <a:prstGeom prst="rect">
+            <a:avLst/>
+          </a:prstGeom>
+          <a:solidFill>
+            <a:srgbClr val="FBEED3"/>
+          </a:solidFill>
+          <a:ln w="10160">
+            <a:solidFill>
+              <a:srgbClr val="C29A3C"/>
+            </a:solidFill>
+          </a:ln>
+        </p:spPr>
+        <p:style>
+          <a:lnRef idx="1">
+            <a:schemeClr val="accent1"/>
+          </a:lnRef>
+          <a:fillRef idx="3">
+            <a:schemeClr val="accent1"/>
+          </a:fillRef>
+          <a:effectRef idx="2">
+            <a:schemeClr val="accent1"/>
+          </a:effectRef>
+          <a:fontRef idx="minor">
+            <a:schemeClr val="lt1"/>
+          </a:fontRef>
+        </p:style>
+        <p:txBody>
+          <a:bodyPr rtlCol="0" anchor="ctr"/>
+          <a:lstStyle/>
+          <a:p>
+            <a:pPr algn="ctr"/>
+          </a:p>
+        </p:txBody>
+      </p:sp>
+      <p:sp>
+        <p:nvSpPr>
+          <p:cNvPr id="11" name="TextBox 10"/>
+          <p:cNvSpPr txBox="1"/>
+          <p:nvPr/>
+        </p:nvSpPr>
+        <p:spPr>
+          <a:xfrm>
+            <a:off x="320040" y="4882896"/>
+            <a:ext cx="8503920" cy="402336"/>
+          </a:xfrm>
+          <a:prstGeom prst="rect">
+            <a:avLst/>
+          </a:prstGeom>
+          <a:noFill/>
+        </p:spPr>
+        <p:txBody>
+          <a:bodyPr wrap="square">
+            <a:spAutoFit/>
+          </a:bodyPr>
+          <a:lstStyle/>
+          <a:p>
+            <a:pPr algn="l"/>
+            <a:r>
+              <a:rPr sz="1050" b="0" i="0">
+                <a:solidFill>
+                  <a:srgbClr val="1C170E"/>
+                </a:solidFill>
+                <a:latin typeface="Courier New"/>
+              </a:rPr>
+              <a:t>TXN00001       0        Low — Routine monitoring       None</a:t>
+            </a:r>
+          </a:p>
+        </p:txBody>
+      </p:sp>
+      <p:sp>
+        <p:nvSpPr>
+          <p:cNvPr id="12" name="Rectangle 11"/>
+          <p:cNvSpPr/>
+          <p:nvPr/>
+        </p:nvSpPr>
+        <p:spPr>
+          <a:xfrm>
+            <a:off x="182880" y="5321808"/>
+            <a:ext cx="8778240" cy="457200"/>
+          </a:xfrm>
+          <a:prstGeom prst="rect">
+            <a:avLst/>
+          </a:prstGeom>
+          <a:solidFill>
+            <a:srgbClr val="FFEBEB"/>
+          </a:solidFill>
+          <a:ln w="10160">
+            <a:solidFill>
+              <a:srgbClr val="C29A3C"/>
+            </a:solidFill>
+          </a:ln>
+        </p:spPr>
+        <p:style>
+          <a:lnRef idx="1">
+            <a:schemeClr val="accent1"/>
+          </a:lnRef>
+          <a:fillRef idx="3">
+            <a:schemeClr val="accent1"/>
+          </a:fillRef>
+          <a:effectRef idx="2">
+            <a:schemeClr val="accent1"/>
+          </a:effectRef>
+          <a:fontRef idx="minor">
+            <a:schemeClr val="lt1"/>
+          </a:fontRef>
+        </p:style>
+        <p:txBody>
+          <a:bodyPr rtlCol="0" anchor="ctr"/>
+          <a:lstStyle/>
+          <a:p>
+            <a:pPr algn="ctr"/>
+          </a:p>
+        </p:txBody>
+      </p:sp>
+      <p:sp>
+        <p:nvSpPr>
+          <p:cNvPr id="13" name="TextBox 12"/>
+          <p:cNvSpPr txBox="1"/>
+          <p:nvPr/>
+        </p:nvSpPr>
+        <p:spPr>
+          <a:xfrm>
+            <a:off x="320040" y="5358384"/>
+            <a:ext cx="8503920" cy="402336"/>
+          </a:xfrm>
+          <a:prstGeom prst="rect">
+            <a:avLst/>
+          </a:prstGeom>
+          <a:noFill/>
+        </p:spPr>
+        <p:txBody>
+          <a:bodyPr wrap="square">
+            <a:spAutoFit/>
+          </a:bodyPr>
+          <a:lstStyle/>
+          <a:p>
+            <a:pPr algn="l"/>
+            <a:r>
+              <a:rPr sz="1050" b="0" i="0">
+                <a:solidFill>
+                  <a:srgbClr val="1C170E"/>
+                </a:solidFill>
+                <a:latin typeface="Courier New"/>
+              </a:rPr>
+              <a:t>TXN00003       100     High — Priority analyst review  High amount, new location, high frequency, new beneficiary, unusual time</a:t>
+            </a:r>
+          </a:p>
+        </p:txBody>
+      </p:sp>
+      <p:sp>
+        <p:nvSpPr>
+          <p:cNvPr id="14" name="Rectangle 13"/>
+          <p:cNvSpPr/>
+          <p:nvPr/>
+        </p:nvSpPr>
+        <p:spPr>
+          <a:xfrm>
+            <a:off x="182880" y="5797296"/>
+            <a:ext cx="8778240" cy="457200"/>
+          </a:xfrm>
+          <a:prstGeom prst="rect">
+            <a:avLst/>
+          </a:prstGeom>
+          <a:solidFill>
+            <a:srgbClr val="FFF5CC"/>
+          </a:solidFill>
+          <a:ln w="10160">
+            <a:solidFill>
+              <a:srgbClr val="C29A3C"/>
+            </a:solidFill>
+          </a:ln>
+        </p:spPr>
+        <p:style>
+          <a:lnRef idx="1">
+            <a:schemeClr val="accent1"/>
+          </a:lnRef>
+          <a:fillRef idx="3">
+            <a:schemeClr val="accent1"/>
+          </a:fillRef>
+          <a:effectRef idx="2">
+            <a:schemeClr val="accent1"/>
+          </a:effectRef>
+          <a:fontRef idx="minor">
+            <a:schemeClr val="lt1"/>
+          </a:fontRef>
+        </p:style>
+        <p:txBody>
+          <a:bodyPr rtlCol="0" anchor="ctr"/>
+          <a:lstStyle/>
+          <a:p>
+            <a:pPr algn="ctr"/>
+          </a:p>
+        </p:txBody>
+      </p:sp>
+      <p:sp>
+        <p:nvSpPr>
+          <p:cNvPr id="15" name="TextBox 14"/>
+          <p:cNvSpPr txBox="1"/>
+          <p:nvPr/>
+        </p:nvSpPr>
+        <p:spPr>
+          <a:xfrm>
+            <a:off x="320040" y="5833872"/>
+            <a:ext cx="8503920" cy="402336"/>
+          </a:xfrm>
+          <a:prstGeom prst="rect">
+            <a:avLst/>
+          </a:prstGeom>
+          <a:noFill/>
+        </p:spPr>
+        <p:txBody>
+          <a:bodyPr wrap="square">
+            <a:spAutoFit/>
+          </a:bodyPr>
+          <a:lstStyle/>
+          <a:p>
+            <a:pPr algn="l"/>
+            <a:r>
+              <a:rPr sz="1050" b="0" i="0">
+                <a:solidFill>
+                  <a:srgbClr val="1C170E"/>
+                </a:solidFill>
+                <a:latin typeface="Courier New"/>
+              </a:rPr>
+              <a:t>TXN00004       35       Medium — Analyst review         New location, new beneficiary</a:t>
             </a:r>
           </a:p>
         </p:txBody>
@@ -4979,7 +6574,7 @@
     <p:bg>
       <p:bgPr>
         <a:solidFill>
-          <a:srgbClr val="FFFFFF"/>
+          <a:srgbClr val="FDF6E3"/>
         </a:solidFill>
         <a:effectLst/>
       </p:bgPr>
@@ -5000,15 +6595,15 @@
         <p:spPr>
           <a:xfrm>
             <a:off x="0" y="0"/>
-            <a:ext cx="12191695" cy="411480"/>
+            <a:ext cx="9144000" cy="960120"/>
           </a:xfrm>
           <a:prstGeom prst="rect">
             <a:avLst/>
           </a:prstGeom>
           <a:solidFill>
-            <a:srgbClr val="248CA0"/>
+            <a:srgbClr val="8B1A1A"/>
           </a:solidFill>
-          <a:ln>
+          <a:ln w="19050">
             <a:noFill/>
           </a:ln>
         </p:spPr>
@@ -5042,43 +6637,8 @@
         </p:nvSpPr>
         <p:spPr>
           <a:xfrm>
-            <a:off x="640080" y="685800"/>
-            <a:ext cx="9601200" cy="640080"/>
-          </a:xfrm>
-          <a:prstGeom prst="rect">
-            <a:avLst/>
-          </a:prstGeom>
-          <a:noFill/>
-        </p:spPr>
-        <p:txBody>
-          <a:bodyPr wrap="none">
-            <a:spAutoFit/>
-          </a:bodyPr>
-          <a:lstStyle/>
-          <a:p>
-            <a:pPr>
-              <a:defRPr sz="2400" b="1">
-                <a:solidFill>
-                  <a:srgbClr val="122340"/>
-                </a:solidFill>
-              </a:defRPr>
-            </a:pPr>
-            <a:r>
-              <a:t>Validation, Testing and Safety</a:t>
-            </a:r>
-          </a:p>
-        </p:txBody>
-      </p:sp>
-      <p:sp>
-        <p:nvSpPr>
-          <p:cNvPr id="4" name="TextBox 3"/>
-          <p:cNvSpPr txBox="1"/>
-          <p:nvPr/>
-        </p:nvSpPr>
-        <p:spPr>
-          <a:xfrm>
-            <a:off x="731520" y="1463040"/>
-            <a:ext cx="10241280" cy="4389120"/>
+            <a:off x="256032" y="91440"/>
+            <a:ext cx="8686800" cy="777240"/>
           </a:xfrm>
           <a:prstGeom prst="rect">
             <a:avLst/>
@@ -5091,63 +6651,374 @@
           </a:bodyPr>
           <a:lstStyle/>
           <a:p>
-            <a:pPr>
-              <a:spcAft>
-                <a:spcPts val="1000"/>
-              </a:spcAft>
-              <a:defRPr sz="2000">
-                <a:solidFill>
-                  <a:srgbClr val="1E1E1E"/>
-                </a:solidFill>
-              </a:defRPr>
-            </a:pPr>
-            <a:r>
-              <a:t>The Critic recomputes the expected assessment and checks for mismatches.</a:t>
-            </a:r>
-          </a:p>
-          <a:p>
-            <a:pPr>
-              <a:spcAft>
-                <a:spcPts val="1000"/>
-              </a:spcAft>
-              <a:defRPr sz="2000">
-                <a:solidFill>
-                  <a:srgbClr val="1E1E1E"/>
-                </a:solidFill>
-              </a:defRPr>
-            </a:pPr>
-            <a:r>
-              <a:t>A failed validation results in manual review and not automatic blocking.</a:t>
-            </a:r>
-          </a:p>
-          <a:p>
-            <a:pPr>
-              <a:spcAft>
-                <a:spcPts val="1000"/>
-              </a:spcAft>
-              <a:defRPr sz="2000">
-                <a:solidFill>
-                  <a:srgbClr val="1E1E1E"/>
-                </a:solidFill>
-              </a:defRPr>
-            </a:pPr>
-            <a:r>
-              <a:t>The project includes 9 automated tests covering workflow execution, scoring, validation, and boundary checks.</a:t>
-            </a:r>
-          </a:p>
-          <a:p>
-            <a:pPr>
-              <a:spcAft>
-                <a:spcPts val="1000"/>
-              </a:spcAft>
-              <a:defRPr sz="2000">
-                <a:solidFill>
-                  <a:srgbClr val="1E1E1E"/>
-                </a:solidFill>
-              </a:defRPr>
-            </a:pPr>
-            <a:r>
-              <a:t>This makes the demo more trustworthy and academically strong.</a:t>
+            <a:pPr algn="l"/>
+            <a:r>
+              <a:rPr sz="3000" b="1" i="0">
+                <a:solidFill>
+                  <a:srgbClr val="FDF6E3"/>
+                </a:solidFill>
+                <a:latin typeface="Caveat"/>
+              </a:rPr>
+              <a:t>Honest Limitations</a:t>
+            </a:r>
+          </a:p>
+        </p:txBody>
+      </p:sp>
+      <p:sp>
+        <p:nvSpPr>
+          <p:cNvPr id="4" name="Rectangle 3"/>
+          <p:cNvSpPr/>
+          <p:nvPr/>
+        </p:nvSpPr>
+        <p:spPr>
+          <a:xfrm>
+            <a:off x="228600" y="1097280"/>
+            <a:ext cx="8686800" cy="5257800"/>
+          </a:xfrm>
+          <a:prstGeom prst="rect">
+            <a:avLst/>
+          </a:prstGeom>
+          <a:solidFill>
+            <a:srgbClr val="FBEED3"/>
+          </a:solidFill>
+          <a:ln w="22860">
+            <a:solidFill>
+              <a:srgbClr val="C29A3C"/>
+            </a:solidFill>
+          </a:ln>
+        </p:spPr>
+        <p:style>
+          <a:lnRef idx="1">
+            <a:schemeClr val="accent1"/>
+          </a:lnRef>
+          <a:fillRef idx="3">
+            <a:schemeClr val="accent1"/>
+          </a:fillRef>
+          <a:effectRef idx="2">
+            <a:schemeClr val="accent1"/>
+          </a:effectRef>
+          <a:fontRef idx="minor">
+            <a:schemeClr val="lt1"/>
+          </a:fontRef>
+        </p:style>
+        <p:txBody>
+          <a:bodyPr rtlCol="0" anchor="ctr"/>
+          <a:lstStyle/>
+          <a:p>
+            <a:pPr algn="ctr"/>
+          </a:p>
+        </p:txBody>
+      </p:sp>
+      <p:sp>
+        <p:nvSpPr>
+          <p:cNvPr id="5" name="TextBox 4"/>
+          <p:cNvSpPr txBox="1"/>
+          <p:nvPr/>
+        </p:nvSpPr>
+        <p:spPr>
+          <a:xfrm>
+            <a:off x="411480" y="1170432"/>
+            <a:ext cx="8229600" cy="457200"/>
+          </a:xfrm>
+          <a:prstGeom prst="rect">
+            <a:avLst/>
+          </a:prstGeom>
+          <a:noFill/>
+        </p:spPr>
+        <p:txBody>
+          <a:bodyPr wrap="square">
+            <a:spAutoFit/>
+          </a:bodyPr>
+          <a:lstStyle/>
+          <a:p>
+            <a:pPr algn="l"/>
+            <a:r>
+              <a:rPr sz="2000" b="1" i="0">
+                <a:solidFill>
+                  <a:srgbClr val="8B1A1A"/>
+                </a:solidFill>
+                <a:latin typeface="Caveat"/>
+              </a:rPr>
+              <a:t>What this system cannot tell you</a:t>
+            </a:r>
+          </a:p>
+        </p:txBody>
+      </p:sp>
+      <p:sp>
+        <p:nvSpPr>
+          <p:cNvPr id="6" name="TextBox 5"/>
+          <p:cNvSpPr txBox="1"/>
+          <p:nvPr/>
+        </p:nvSpPr>
+        <p:spPr>
+          <a:xfrm>
+            <a:off x="411480" y="1691640"/>
+            <a:ext cx="8321040" cy="4480560"/>
+          </a:xfrm>
+          <a:prstGeom prst="rect">
+            <a:avLst/>
+          </a:prstGeom>
+          <a:noFill/>
+        </p:spPr>
+        <p:txBody>
+          <a:bodyPr wrap="square">
+            <a:spAutoFit/>
+          </a:bodyPr>
+          <a:lstStyle/>
+          <a:p>
+            <a:pPr>
+              <a:spcBef>
+                <a:spcPts val="300"/>
+              </a:spcBef>
+            </a:pPr>
+            <a:r>
+              <a:rPr sz="1250" b="0" i="0">
+                <a:solidFill>
+                  <a:srgbClr val="1C170E"/>
+                </a:solidFill>
+                <a:latin typeface="Segoe UI"/>
+              </a:rPr>
+              <a:t>Classification accuracy: not available.</a:t>
+            </a:r>
+          </a:p>
+          <a:p>
+            <a:pPr>
+              <a:spcBef>
+                <a:spcPts val="300"/>
+              </a:spcBef>
+            </a:pPr>
+            <a:r>
+              <a:rPr sz="1250" b="0" i="0">
+                <a:solidFill>
+                  <a:srgbClr val="1C170E"/>
+                </a:solidFill>
+                <a:latin typeface="Segoe UI"/>
+              </a:rPr>
+              <a:t>  The CSV has no verified fraud/legitimate labels. Accuracy, precision, recall, F1, and ROC-AUC</a:t>
+            </a:r>
+          </a:p>
+          <a:p>
+            <a:pPr>
+              <a:spcBef>
+                <a:spcPts val="300"/>
+              </a:spcBef>
+            </a:pPr>
+            <a:r>
+              <a:rPr sz="1250" b="0" i="0">
+                <a:solidFill>
+                  <a:srgbClr val="1C170E"/>
+                </a:solidFill>
+                <a:latin typeface="Segoe UI"/>
+              </a:rPr>
+              <a:t>  cannot be calculated honestly from this dataset. The score is a rule total, not a fraud probability.</a:t>
+            </a:r>
+          </a:p>
+          <a:p>
+            <a:pPr>
+              <a:spcBef>
+                <a:spcPts val="300"/>
+              </a:spcBef>
+            </a:pPr>
+            <a:r>
+              <a:rPr sz="1250" b="0" i="0">
+                <a:solidFill>
+                  <a:srgbClr val="1C170E"/>
+                </a:solidFill>
+                <a:latin typeface="Segoe UI"/>
+              </a:rPr>
+              <a:t/>
+            </a:r>
+          </a:p>
+          <a:p>
+            <a:pPr>
+              <a:spcBef>
+                <a:spcPts val="300"/>
+              </a:spcBef>
+            </a:pPr>
+            <a:r>
+              <a:rPr sz="1250" b="0" i="0">
+                <a:solidFill>
+                  <a:srgbClr val="1C170E"/>
+                </a:solidFill>
+                <a:latin typeface="Segoe UI"/>
+              </a:rPr>
+              <a:t>Performance benchmark: not measured.</a:t>
+            </a:r>
+          </a:p>
+          <a:p>
+            <a:pPr>
+              <a:spcBef>
+                <a:spcPts val="300"/>
+              </a:spcBef>
+            </a:pPr>
+            <a:r>
+              <a:rPr sz="1250" b="0" i="0">
+                <a:solidFill>
+                  <a:srgbClr val="1C170E"/>
+                </a:solidFill>
+                <a:latin typeface="Segoe UI"/>
+              </a:rPr>
+              <a:t>  500 rows ran successfully. That confirms the pipeline works — it is not a latency or</a:t>
+            </a:r>
+          </a:p>
+          <a:p>
+            <a:pPr>
+              <a:spcBef>
+                <a:spcPts val="300"/>
+              </a:spcBef>
+            </a:pPr>
+            <a:r>
+              <a:rPr sz="1250" b="0" i="0">
+                <a:solidFill>
+                  <a:srgbClr val="1C170E"/>
+                </a:solidFill>
+                <a:latin typeface="Segoe UI"/>
+              </a:rPr>
+              <a:t>  throughput benchmark, and no competing system was compared.</a:t>
+            </a:r>
+          </a:p>
+          <a:p>
+            <a:pPr>
+              <a:spcBef>
+                <a:spcPts val="300"/>
+              </a:spcBef>
+            </a:pPr>
+            <a:r>
+              <a:rPr sz="1250" b="0" i="0">
+                <a:solidFill>
+                  <a:srgbClr val="1C170E"/>
+                </a:solidFill>
+                <a:latin typeface="Segoe UI"/>
+              </a:rPr>
+              <a:t/>
+            </a:r>
+          </a:p>
+          <a:p>
+            <a:pPr>
+              <a:spcBef>
+                <a:spcPts val="300"/>
+              </a:spcBef>
+            </a:pPr>
+            <a:r>
+              <a:rPr sz="1250" b="0" i="0">
+                <a:solidFill>
+                  <a:srgbClr val="1C170E"/>
+                </a:solidFill>
+                <a:latin typeface="Segoe UI"/>
+              </a:rPr>
+              <a:t>Critic blind spot: Executor and Critic use the same scoring function.</a:t>
+            </a:r>
+          </a:p>
+          <a:p>
+            <a:pPr>
+              <a:spcBef>
+                <a:spcPts val="300"/>
+              </a:spcBef>
+            </a:pPr>
+            <a:r>
+              <a:rPr sz="1250" b="0" i="0">
+                <a:solidFill>
+                  <a:srgbClr val="1C170E"/>
+                </a:solidFill>
+                <a:latin typeface="Segoe UI"/>
+              </a:rPr>
+              <a:t>  A shared defect in risk_engine.py would not be caught by the Critic's recomputation.</a:t>
+            </a:r>
+          </a:p>
+          <a:p>
+            <a:pPr>
+              <a:spcBef>
+                <a:spcPts val="300"/>
+              </a:spcBef>
+            </a:pPr>
+            <a:r>
+              <a:rPr sz="1250" b="0" i="0">
+                <a:solidFill>
+                  <a:srgbClr val="1C170E"/>
+                </a:solidFill>
+                <a:latin typeface="Segoe UI"/>
+              </a:rPr>
+              <a:t/>
+            </a:r>
+          </a:p>
+          <a:p>
+            <a:pPr>
+              <a:spcBef>
+                <a:spcPts val="300"/>
+              </a:spcBef>
+            </a:pPr>
+            <a:r>
+              <a:rPr sz="1250" b="0" i="0">
+                <a:solidFill>
+                  <a:srgbClr val="1C170E"/>
+                </a:solidFill>
+                <a:latin typeface="Segoe UI"/>
+              </a:rPr>
+              <a:t>Synthetic data only.</a:t>
+            </a:r>
+          </a:p>
+          <a:p>
+            <a:pPr>
+              <a:spcBef>
+                <a:spcPts val="300"/>
+              </a:spcBef>
+            </a:pPr>
+            <a:r>
+              <a:rPr sz="1250" b="0" i="0">
+                <a:solidFill>
+                  <a:srgbClr val="1C170E"/>
+                </a:solidFill>
+                <a:latin typeface="Segoe UI"/>
+              </a:rPr>
+              <a:t>  No conclusions about real customers or real fraud patterns can be drawn from these results.</a:t>
+            </a:r>
+          </a:p>
+          <a:p>
+            <a:pPr>
+              <a:spcBef>
+                <a:spcPts val="300"/>
+              </a:spcBef>
+            </a:pPr>
+            <a:r>
+              <a:rPr sz="1250" b="0" i="0">
+                <a:solidFill>
+                  <a:srgbClr val="1C170E"/>
+                </a:solidFill>
+                <a:latin typeface="Segoe UI"/>
+              </a:rPr>
+              <a:t/>
+            </a:r>
+          </a:p>
+          <a:p>
+            <a:pPr>
+              <a:spcBef>
+                <a:spcPts val="300"/>
+              </a:spcBef>
+            </a:pPr>
+            <a:r>
+              <a:rPr sz="1250" b="0" i="0">
+                <a:solidFill>
+                  <a:srgbClr val="1C170E"/>
+                </a:solidFill>
+                <a:latin typeface="Segoe UI"/>
+              </a:rPr>
+              <a:t>Rule weights are illustrative.</a:t>
+            </a:r>
+          </a:p>
+          <a:p>
+            <a:pPr>
+              <a:spcBef>
+                <a:spcPts val="300"/>
+              </a:spcBef>
+            </a:pPr>
+            <a:r>
+              <a:rPr sz="1250" b="0" i="0">
+                <a:solidFill>
+                  <a:srgbClr val="1C170E"/>
+                </a:solidFill>
+                <a:latin typeface="Segoe UI"/>
+              </a:rPr>
+              <a:t>  The point values were not calibrated against any verified outcome dataset.</a:t>
             </a:r>
           </a:p>
         </p:txBody>
@@ -5166,7 +7037,7 @@
     <p:bg>
       <p:bgPr>
         <a:solidFill>
-          <a:srgbClr val="FFFFFF"/>
+          <a:srgbClr val="FDF6E3"/>
         </a:solidFill>
         <a:effectLst/>
       </p:bgPr>
@@ -5187,15 +7058,15 @@
         <p:spPr>
           <a:xfrm>
             <a:off x="0" y="0"/>
-            <a:ext cx="12191695" cy="411480"/>
+            <a:ext cx="9144000" cy="960120"/>
           </a:xfrm>
           <a:prstGeom prst="rect">
             <a:avLst/>
           </a:prstGeom>
           <a:solidFill>
-            <a:srgbClr val="2862A8"/>
+            <a:srgbClr val="1C170E"/>
           </a:solidFill>
-          <a:ln>
+          <a:ln w="19050">
             <a:noFill/>
           </a:ln>
         </p:spPr>
@@ -5229,8 +7100,8 @@
         </p:nvSpPr>
         <p:spPr>
           <a:xfrm>
-            <a:off x="640080" y="685800"/>
-            <a:ext cx="9601200" cy="457200"/>
+            <a:off x="256032" y="91440"/>
+            <a:ext cx="8686800" cy="777240"/>
           </a:xfrm>
           <a:prstGeom prst="rect">
             <a:avLst/>
@@ -5238,20 +7109,20 @@
           <a:noFill/>
         </p:spPr>
         <p:txBody>
-          <a:bodyPr wrap="none">
+          <a:bodyPr wrap="square">
             <a:spAutoFit/>
           </a:bodyPr>
           <a:lstStyle/>
           <a:p>
-            <a:pPr>
-              <a:defRPr b="1" sz="2200">
-                <a:solidFill>
-                  <a:srgbClr val="122340"/>
-                </a:solidFill>
-              </a:defRPr>
-            </a:pPr>
-            <a:r>
-              <a:t>Limitations and Future Scope</a:t>
+            <a:pPr algn="l"/>
+            <a:r>
+              <a:rPr sz="3000" b="1" i="0">
+                <a:solidFill>
+                  <a:srgbClr val="FDF6E3"/>
+                </a:solidFill>
+                <a:latin typeface="Caveat"/>
+              </a:rPr>
+              <a:t>Repository</a:t>
             </a:r>
           </a:p>
         </p:txBody>
@@ -5264,18 +7135,18 @@
         </p:nvSpPr>
         <p:spPr>
           <a:xfrm>
-            <a:off x="731520" y="1371600"/>
-            <a:ext cx="4937760" cy="4389120"/>
+            <a:off x="1097280" y="1143000"/>
+            <a:ext cx="6949440" cy="4754880"/>
           </a:xfrm>
           <a:prstGeom prst="rect">
             <a:avLst/>
           </a:prstGeom>
           <a:solidFill>
-            <a:srgbClr val="EEF5FF"/>
+            <a:srgbClr val="FBEED3"/>
           </a:solidFill>
-          <a:ln w="19050">
+          <a:ln w="31750">
             <a:solidFill>
-              <a:srgbClr val="2862A8"/>
+              <a:srgbClr val="C29A3C"/>
             </a:solidFill>
           </a:ln>
         </p:spPr>
@@ -5294,103 +7165,67 @@
           </a:fontRef>
         </p:style>
         <p:txBody>
-          <a:bodyPr rtlCol="0" anchor="ctr" wrap="square"/>
-          <a:lstStyle/>
-          <a:p>
-            <a:pPr algn="ctr">
-              <a:defRPr b="1" sz="1800">
-                <a:solidFill>
-                  <a:srgbClr val="122340"/>
-                </a:solidFill>
-              </a:defRPr>
-            </a:pPr>
-            <a:r>
-              <a:t>Current limits</a:t>
-            </a:r>
-          </a:p>
-          <a:p>
-            <a:pPr>
-              <a:spcAft>
-                <a:spcPts val="800"/>
-              </a:spcAft>
-              <a:defRPr sz="1600">
-                <a:solidFill>
-                  <a:srgbClr val="1E1E1E"/>
-                </a:solidFill>
-              </a:defRPr>
-            </a:pPr>
-            <a:r>
-              <a:t>Synthetic dataset only.</a:t>
-            </a:r>
-          </a:p>
-          <a:p>
-            <a:pPr>
-              <a:spcAft>
-                <a:spcPts val="800"/>
-              </a:spcAft>
-              <a:defRPr sz="1600">
-                <a:solidFill>
-                  <a:srgbClr val="1E1E1E"/>
-                </a:solidFill>
-              </a:defRPr>
-            </a:pPr>
-            <a:r>
-              <a:t>Illustrative thresholds and rules, not a calibrated fraud model.</a:t>
-            </a:r>
-          </a:p>
-          <a:p>
-            <a:pPr>
-              <a:spcAft>
-                <a:spcPts val="800"/>
-              </a:spcAft>
-              <a:defRPr sz="1600">
-                <a:solidFill>
-                  <a:srgbClr val="1E1E1E"/>
-                </a:solidFill>
-              </a:defRPr>
-            </a:pPr>
-            <a:r>
-              <a:t>No production-grade deployment or real banking integration.</a:t>
-            </a:r>
-          </a:p>
-          <a:p>
-            <a:pPr>
-              <a:spcAft>
-                <a:spcPts val="800"/>
-              </a:spcAft>
-              <a:defRPr sz="1600">
-                <a:solidFill>
-                  <a:srgbClr val="1E1E1E"/>
-                </a:solidFill>
-              </a:defRPr>
-            </a:pPr>
-            <a:r>
-              <a:t>The demo is for learning and evaluation, not real-world fraud enforcement.</a:t>
-            </a:r>
-          </a:p>
-        </p:txBody>
-      </p:sp>
-      <p:sp>
-        <p:nvSpPr>
-          <p:cNvPr id="5" name="Rectangle 4"/>
+          <a:bodyPr rtlCol="0" anchor="ctr"/>
+          <a:lstStyle/>
+          <a:p>
+            <a:pPr algn="ctr"/>
+          </a:p>
+        </p:txBody>
+      </p:sp>
+      <p:sp>
+        <p:nvSpPr>
+          <p:cNvPr id="5" name="TextBox 4"/>
+          <p:cNvSpPr txBox="1"/>
+          <p:nvPr/>
+        </p:nvSpPr>
+        <p:spPr>
+          <a:xfrm>
+            <a:off x="1280160" y="1261872"/>
+            <a:ext cx="6583680" cy="621792"/>
+          </a:xfrm>
+          <a:prstGeom prst="rect">
+            <a:avLst/>
+          </a:prstGeom>
+          <a:noFill/>
+        </p:spPr>
+        <p:txBody>
+          <a:bodyPr wrap="square">
+            <a:spAutoFit/>
+          </a:bodyPr>
+          <a:lstStyle/>
+          <a:p>
+            <a:pPr algn="ctr"/>
+            <a:r>
+              <a:rPr sz="2400" b="1" i="0">
+                <a:solidFill>
+                  <a:srgbClr val="1B4F8A"/>
+                </a:solidFill>
+                <a:latin typeface="Caveat"/>
+              </a:rPr>
+              <a:t>github.com/Nirrmam2211/finguard-ai</a:t>
+            </a:r>
+          </a:p>
+        </p:txBody>
+      </p:sp>
+      <p:sp>
+        <p:nvSpPr>
+          <p:cNvPr id="6" name="Rectangle 5"/>
           <p:cNvSpPr/>
           <p:nvPr/>
         </p:nvSpPr>
         <p:spPr>
           <a:xfrm>
-            <a:off x="6126480" y="1371600"/>
-            <a:ext cx="5303520" cy="4389120"/>
+            <a:off x="1188720" y="1920240"/>
+            <a:ext cx="6766560" cy="36576"/>
           </a:xfrm>
           <a:prstGeom prst="rect">
             <a:avLst/>
           </a:prstGeom>
           <a:solidFill>
-            <a:srgbClr val="EEF5FF"/>
+            <a:srgbClr val="C29A3C"/>
           </a:solidFill>
           <a:ln w="19050">
-            <a:solidFill>
-              <a:srgbClr val="2862A8"/>
-            </a:solidFill>
+            <a:noFill/>
           </a:ln>
         </p:spPr>
         <p:style>
@@ -5408,78 +7243,254 @@
           </a:fontRef>
         </p:style>
         <p:txBody>
-          <a:bodyPr rtlCol="0" anchor="ctr" wrap="square"/>
-          <a:lstStyle/>
-          <a:p>
-            <a:pPr algn="ctr">
-              <a:defRPr b="1" sz="1800">
-                <a:solidFill>
-                  <a:srgbClr val="122340"/>
-                </a:solidFill>
-              </a:defRPr>
-            </a:pPr>
-            <a:r>
-              <a:t>Next improvements</a:t>
-            </a:r>
-          </a:p>
-          <a:p>
-            <a:pPr>
-              <a:spcAft>
-                <a:spcPts val="800"/>
-              </a:spcAft>
-              <a:defRPr sz="1600">
-                <a:solidFill>
-                  <a:srgbClr val="1E1E1E"/>
-                </a:solidFill>
-              </a:defRPr>
-            </a:pPr>
-            <a:r>
-              <a:t>Use real customer-history data and labeled cases.</a:t>
-            </a:r>
-          </a:p>
-          <a:p>
-            <a:pPr>
-              <a:spcAft>
-                <a:spcPts val="800"/>
-              </a:spcAft>
-              <a:defRPr sz="1600">
-                <a:solidFill>
-                  <a:srgbClr val="1E1E1E"/>
-                </a:solidFill>
-              </a:defRPr>
-            </a:pPr>
-            <a:r>
-              <a:t>Tune thresholds using historical risk data.</a:t>
-            </a:r>
-          </a:p>
-          <a:p>
-            <a:pPr>
-              <a:spcAft>
-                <a:spcPts val="800"/>
-              </a:spcAft>
-              <a:defRPr sz="1600">
-                <a:solidFill>
-                  <a:srgbClr val="1E1E1E"/>
-                </a:solidFill>
-              </a:defRPr>
-            </a:pPr>
-            <a:r>
-              <a:t>Add richer analyst workflows and audit logging.</a:t>
-            </a:r>
-          </a:p>
-          <a:p>
-            <a:pPr>
-              <a:spcAft>
-                <a:spcPts val="800"/>
-              </a:spcAft>
-              <a:defRPr sz="1600">
-                <a:solidFill>
-                  <a:srgbClr val="1E1E1E"/>
-                </a:solidFill>
-              </a:defRPr>
-            </a:pPr>
-            <a:r>
-              <a:t>Keep the final decision human-reviewed while adding AI support for evidence gathering.</a:t>
+          <a:bodyPr rtlCol="0" anchor="ctr"/>
+          <a:lstStyle/>
+          <a:p>
+            <a:pPr algn="ctr"/>
+          </a:p>
+        </p:txBody>
+      </p:sp>
+      <p:sp>
+        <p:nvSpPr>
+          <p:cNvPr id="7" name="TextBox 6"/>
+          <p:cNvSpPr txBox="1"/>
+          <p:nvPr/>
+        </p:nvSpPr>
+        <p:spPr>
+          <a:xfrm>
+            <a:off x="1325880" y="2029968"/>
+            <a:ext cx="6492240" cy="3200400"/>
+          </a:xfrm>
+          <a:prstGeom prst="rect">
+            <a:avLst/>
+          </a:prstGeom>
+          <a:noFill/>
+        </p:spPr>
+        <p:txBody>
+          <a:bodyPr wrap="square">
+            <a:spAutoFit/>
+          </a:bodyPr>
+          <a:lstStyle/>
+          <a:p>
+            <a:pPr>
+              <a:spcBef>
+                <a:spcPts val="600"/>
+              </a:spcBef>
+            </a:pPr>
+            <a:r>
+              <a:rPr sz="1250" b="0" i="0">
+                <a:solidFill>
+                  <a:srgbClr val="1C170E"/>
+                </a:solidFill>
+                <a:latin typeface="Courier New"/>
+              </a:rPr>
+              <a:t>risk_engine.py           Scoring rules, validation, thresholds</a:t>
+            </a:r>
+          </a:p>
+          <a:p>
+            <a:pPr>
+              <a:spcBef>
+                <a:spcPts val="600"/>
+              </a:spcBef>
+            </a:pPr>
+            <a:r>
+              <a:rPr sz="1250" b="0" i="0">
+                <a:solidFill>
+                  <a:srgbClr val="1C170E"/>
+                </a:solidFill>
+                <a:latin typeface="Courier New"/>
+              </a:rPr>
+              <a:t>orchestrator.py          Pipeline state machine</a:t>
+            </a:r>
+          </a:p>
+          <a:p>
+            <a:pPr>
+              <a:spcBef>
+                <a:spcPts val="600"/>
+              </a:spcBef>
+            </a:pPr>
+            <a:r>
+              <a:rPr sz="1250" b="0" i="0">
+                <a:solidFill>
+                  <a:srgbClr val="1C170E"/>
+                </a:solidFill>
+                <a:latin typeface="Courier New"/>
+              </a:rPr>
+              <a:t>agents/planner.py        Checks fields, creates task list</a:t>
+            </a:r>
+          </a:p>
+          <a:p>
+            <a:pPr>
+              <a:spcBef>
+                <a:spcPts val="600"/>
+              </a:spcBef>
+            </a:pPr>
+            <a:r>
+              <a:rPr sz="1250" b="0" i="0">
+                <a:solidFill>
+                  <a:srgbClr val="1C170E"/>
+                </a:solidFill>
+                <a:latin typeface="Courier New"/>
+              </a:rPr>
+              <a:t>agents/research.py       Collects transaction evidence</a:t>
+            </a:r>
+          </a:p>
+          <a:p>
+            <a:pPr>
+              <a:spcBef>
+                <a:spcPts val="600"/>
+              </a:spcBef>
+            </a:pPr>
+            <a:r>
+              <a:rPr sz="1250" b="0" i="0">
+                <a:solidFill>
+                  <a:srgbClr val="1C170E"/>
+                </a:solidFill>
+                <a:latin typeface="Courier New"/>
+              </a:rPr>
+              <a:t>agents/executor.py       Runs risk engine, produces assessment</a:t>
+            </a:r>
+          </a:p>
+          <a:p>
+            <a:pPr>
+              <a:spcBef>
+                <a:spcPts val="600"/>
+              </a:spcBef>
+            </a:pPr>
+            <a:r>
+              <a:rPr sz="1250" b="0" i="0">
+                <a:solidFill>
+                  <a:srgbClr val="1C170E"/>
+                </a:solidFill>
+                <a:latin typeface="Courier New"/>
+              </a:rPr>
+              <a:t>agents/critic.py         Recomputes and validates</a:t>
+            </a:r>
+          </a:p>
+          <a:p>
+            <a:pPr>
+              <a:spcBef>
+                <a:spcPts val="600"/>
+              </a:spcBef>
+            </a:pPr>
+            <a:r>
+              <a:rPr sz="1250" b="0" i="0">
+                <a:solidFill>
+                  <a:srgbClr val="1C170E"/>
+                </a:solidFill>
+                <a:latin typeface="Courier New"/>
+              </a:rPr>
+              <a:t>app.py                   Streamlit entry point</a:t>
+            </a:r>
+          </a:p>
+          <a:p>
+            <a:pPr>
+              <a:spcBef>
+                <a:spcPts val="600"/>
+              </a:spcBef>
+            </a:pPr>
+            <a:r>
+              <a:rPr sz="1250" b="0" i="0">
+                <a:solidFill>
+                  <a:srgbClr val="1C170E"/>
+                </a:solidFill>
+                <a:latin typeface="Courier New"/>
+              </a:rPr>
+              <a:t>data/transactions.csv    500-row synthetic dataset</a:t>
+            </a:r>
+          </a:p>
+          <a:p>
+            <a:pPr>
+              <a:spcBef>
+                <a:spcPts val="600"/>
+              </a:spcBef>
+            </a:pPr>
+            <a:r>
+              <a:rPr sz="1250" b="0" i="0">
+                <a:solidFill>
+                  <a:srgbClr val="1C170E"/>
+                </a:solidFill>
+                <a:latin typeface="Courier New"/>
+              </a:rPr>
+              <a:t>tests/                   17 unit tests</a:t>
+            </a:r>
+          </a:p>
+        </p:txBody>
+      </p:sp>
+      <p:sp>
+        <p:nvSpPr>
+          <p:cNvPr id="8" name="Rectangle 7"/>
+          <p:cNvSpPr/>
+          <p:nvPr/>
+        </p:nvSpPr>
+        <p:spPr>
+          <a:xfrm>
+            <a:off x="1188720" y="5257800"/>
+            <a:ext cx="6766560" cy="36576"/>
+          </a:xfrm>
+          <a:prstGeom prst="rect">
+            <a:avLst/>
+          </a:prstGeom>
+          <a:solidFill>
+            <a:srgbClr val="C29A3C"/>
+          </a:solidFill>
+          <a:ln w="19050">
+            <a:noFill/>
+          </a:ln>
+        </p:spPr>
+        <p:style>
+          <a:lnRef idx="1">
+            <a:schemeClr val="accent1"/>
+          </a:lnRef>
+          <a:fillRef idx="3">
+            <a:schemeClr val="accent1"/>
+          </a:fillRef>
+          <a:effectRef idx="2">
+            <a:schemeClr val="accent1"/>
+          </a:effectRef>
+          <a:fontRef idx="minor">
+            <a:schemeClr val="lt1"/>
+          </a:fontRef>
+        </p:style>
+        <p:txBody>
+          <a:bodyPr rtlCol="0" anchor="ctr"/>
+          <a:lstStyle/>
+          <a:p>
+            <a:pPr algn="ctr"/>
+          </a:p>
+        </p:txBody>
+      </p:sp>
+      <p:sp>
+        <p:nvSpPr>
+          <p:cNvPr id="9" name="TextBox 8"/>
+          <p:cNvSpPr txBox="1"/>
+          <p:nvPr/>
+        </p:nvSpPr>
+        <p:spPr>
+          <a:xfrm>
+            <a:off x="1325880" y="5321808"/>
+            <a:ext cx="6492240" cy="347472"/>
+          </a:xfrm>
+          <a:prstGeom prst="rect">
+            <a:avLst/>
+          </a:prstGeom>
+          <a:noFill/>
+        </p:spPr>
+        <p:txBody>
+          <a:bodyPr wrap="square">
+            <a:spAutoFit/>
+          </a:bodyPr>
+          <a:lstStyle/>
+          <a:p>
+            <a:pPr algn="l"/>
+            <a:r>
+              <a:rPr sz="1100" b="0" i="0">
+                <a:solidFill>
+                  <a:srgbClr val="2E6E38"/>
+                </a:solidFill>
+                <a:latin typeface="Courier New"/>
+              </a:rPr>
+              <a:t>streamlit run app.py                       python -m unittest discover -s tests -v</a:t>
             </a:r>
           </a:p>
         </p:txBody>
@@ -5498,7 +7509,7 @@
     <p:bg>
       <p:bgPr>
         <a:solidFill>
-          <a:srgbClr val="FFFFFF"/>
+          <a:srgbClr val="FDF6E3"/>
         </a:solidFill>
         <a:effectLst/>
       </p:bgPr>
@@ -5518,17 +7529,17 @@
         </p:nvSpPr>
         <p:spPr>
           <a:xfrm>
-            <a:off x="0" y="0"/>
-            <a:ext cx="12191695" cy="411480"/>
-          </a:xfrm>
-          <a:prstGeom prst="rect">
-            <a:avLst/>
-          </a:prstGeom>
-          <a:solidFill>
-            <a:srgbClr val="122340"/>
-          </a:solidFill>
-          <a:ln>
-            <a:noFill/>
+            <a:off x="164592" y="164592"/>
+            <a:ext cx="8814816" cy="6528816"/>
+          </a:xfrm>
+          <a:prstGeom prst="rect">
+            <a:avLst/>
+          </a:prstGeom>
+          <a:noFill/>
+          <a:ln w="44450">
+            <a:solidFill>
+              <a:srgbClr val="D95F1A"/>
+            </a:solidFill>
           </a:ln>
         </p:spPr>
         <p:style>
@@ -5555,36 +7566,44 @@
       </p:sp>
       <p:sp>
         <p:nvSpPr>
-          <p:cNvPr id="3" name="TextBox 2"/>
-          <p:cNvSpPr txBox="1"/>
-          <p:nvPr/>
-        </p:nvSpPr>
-        <p:spPr>
-          <a:xfrm>
-            <a:off x="640080" y="685800"/>
-            <a:ext cx="9601200" cy="640080"/>
+          <p:cNvPr id="3" name="Rectangle 2"/>
+          <p:cNvSpPr/>
+          <p:nvPr/>
+        </p:nvSpPr>
+        <p:spPr>
+          <a:xfrm>
+            <a:off x="347472" y="347472"/>
+            <a:ext cx="8449056" cy="6163056"/>
           </a:xfrm>
           <a:prstGeom prst="rect">
             <a:avLst/>
           </a:prstGeom>
           <a:noFill/>
-        </p:spPr>
-        <p:txBody>
-          <a:bodyPr wrap="none">
-            <a:spAutoFit/>
-          </a:bodyPr>
-          <a:lstStyle/>
-          <a:p>
-            <a:pPr>
-              <a:defRPr sz="2400" b="1">
-                <a:solidFill>
-                  <a:srgbClr val="122340"/>
-                </a:solidFill>
-              </a:defRPr>
-            </a:pPr>
-            <a:r>
-              <a:t>Conclusion</a:t>
-            </a:r>
+          <a:ln w="15240">
+            <a:solidFill>
+              <a:srgbClr val="C29A3C"/>
+            </a:solidFill>
+          </a:ln>
+        </p:spPr>
+        <p:style>
+          <a:lnRef idx="1">
+            <a:schemeClr val="accent1"/>
+          </a:lnRef>
+          <a:fillRef idx="3">
+            <a:schemeClr val="accent1"/>
+          </a:fillRef>
+          <a:effectRef idx="2">
+            <a:schemeClr val="accent1"/>
+          </a:effectRef>
+          <a:fontRef idx="minor">
+            <a:schemeClr val="lt1"/>
+          </a:fontRef>
+        </p:style>
+        <p:txBody>
+          <a:bodyPr rtlCol="0" anchor="ctr"/>
+          <a:lstStyle/>
+          <a:p>
+            <a:pPr algn="ctr"/>
           </a:p>
         </p:txBody>
       </p:sp>
@@ -5596,8 +7615,8 @@
         </p:nvSpPr>
         <p:spPr>
           <a:xfrm>
-            <a:off x="731520" y="1463040"/>
-            <a:ext cx="10241280" cy="4389120"/>
+            <a:off x="914400" y="1920240"/>
+            <a:ext cx="7315200" cy="1280160"/>
           </a:xfrm>
           <a:prstGeom prst="rect">
             <a:avLst/>
@@ -5610,63 +7629,323 @@
           </a:bodyPr>
           <a:lstStyle/>
           <a:p>
-            <a:pPr>
-              <a:spcAft>
-                <a:spcPts val="1000"/>
-              </a:spcAft>
-              <a:defRPr sz="2000">
-                <a:solidFill>
-                  <a:srgbClr val="1E1E1E"/>
-                </a:solidFill>
-              </a:defRPr>
-            </a:pPr>
-            <a:r>
-              <a:t>FinGuard AI shows how a small multi-agent system can improve transaction review in a banking domain.</a:t>
-            </a:r>
-          </a:p>
-          <a:p>
-            <a:pPr>
-              <a:spcAft>
-                <a:spcPts val="1000"/>
-              </a:spcAft>
-              <a:defRPr sz="2000">
-                <a:solidFill>
-                  <a:srgbClr val="1E1E1E"/>
-                </a:solidFill>
-              </a:defRPr>
-            </a:pPr>
-            <a:r>
-              <a:t>It is explainable, deterministic, and suitable for a CA-3 proof of concept.</a:t>
-            </a:r>
-          </a:p>
-          <a:p>
-            <a:pPr>
-              <a:spcAft>
-                <a:spcPts val="1000"/>
-              </a:spcAft>
-              <a:defRPr sz="2000">
-                <a:solidFill>
-                  <a:srgbClr val="1E1E1E"/>
-                </a:solidFill>
-              </a:defRPr>
-            </a:pPr>
-            <a:r>
-              <a:t>The system supports better triage, stronger validation, and safer human review.</a:t>
-            </a:r>
-          </a:p>
-          <a:p>
-            <a:pPr>
-              <a:spcAft>
-                <a:spcPts val="1000"/>
-              </a:spcAft>
-              <a:defRPr sz="2000">
-                <a:solidFill>
-                  <a:srgbClr val="1E1E1E"/>
-                </a:solidFill>
-              </a:defRPr>
-            </a:pPr>
-            <a:r>
-              <a:t>This is a meaningful example of agentic AI applied to a real business workflow.</a:t>
+            <a:pPr algn="ctr"/>
+            <a:r>
+              <a:rPr sz="6000" b="1" i="0">
+                <a:solidFill>
+                  <a:srgbClr val="D95F1A"/>
+                </a:solidFill>
+                <a:latin typeface="Caveat"/>
+              </a:rPr>
+              <a:t>Thank You</a:t>
+            </a:r>
+          </a:p>
+        </p:txBody>
+      </p:sp>
+      <p:sp>
+        <p:nvSpPr>
+          <p:cNvPr id="5" name="TextBox 4"/>
+          <p:cNvSpPr txBox="1"/>
+          <p:nvPr/>
+        </p:nvSpPr>
+        <p:spPr>
+          <a:xfrm>
+            <a:off x="914400" y="3154680"/>
+            <a:ext cx="7315200" cy="594360"/>
+          </a:xfrm>
+          <a:prstGeom prst="rect">
+            <a:avLst/>
+          </a:prstGeom>
+          <a:noFill/>
+        </p:spPr>
+        <p:txBody>
+          <a:bodyPr wrap="square">
+            <a:spAutoFit/>
+          </a:bodyPr>
+          <a:lstStyle/>
+          <a:p>
+            <a:pPr algn="ctr"/>
+            <a:r>
+              <a:rPr sz="2600" b="0" i="0">
+                <a:solidFill>
+                  <a:srgbClr val="1C170E"/>
+                </a:solidFill>
+                <a:latin typeface="Caveat"/>
+              </a:rPr>
+              <a:t>Questions welcome.</a:t>
+            </a:r>
+          </a:p>
+        </p:txBody>
+      </p:sp>
+      <p:sp>
+        <p:nvSpPr>
+          <p:cNvPr id="6" name="Rectangle 5"/>
+          <p:cNvSpPr/>
+          <p:nvPr/>
+        </p:nvSpPr>
+        <p:spPr>
+          <a:xfrm>
+            <a:off x="2560320" y="3931920"/>
+            <a:ext cx="4023360" cy="36576"/>
+          </a:xfrm>
+          <a:prstGeom prst="rect">
+            <a:avLst/>
+          </a:prstGeom>
+          <a:solidFill>
+            <a:srgbClr val="C29A3C"/>
+          </a:solidFill>
+          <a:ln w="19050">
+            <a:noFill/>
+          </a:ln>
+        </p:spPr>
+        <p:style>
+          <a:lnRef idx="1">
+            <a:schemeClr val="accent1"/>
+          </a:lnRef>
+          <a:fillRef idx="3">
+            <a:schemeClr val="accent1"/>
+          </a:fillRef>
+          <a:effectRef idx="2">
+            <a:schemeClr val="accent1"/>
+          </a:effectRef>
+          <a:fontRef idx="minor">
+            <a:schemeClr val="lt1"/>
+          </a:fontRef>
+        </p:style>
+        <p:txBody>
+          <a:bodyPr rtlCol="0" anchor="ctr"/>
+          <a:lstStyle/>
+          <a:p>
+            <a:pPr algn="ctr"/>
+          </a:p>
+        </p:txBody>
+      </p:sp>
+      <p:sp>
+        <p:nvSpPr>
+          <p:cNvPr id="7" name="TextBox 6"/>
+          <p:cNvSpPr txBox="1"/>
+          <p:nvPr/>
+        </p:nvSpPr>
+        <p:spPr>
+          <a:xfrm>
+            <a:off x="914400" y="4069080"/>
+            <a:ext cx="7315200" cy="777240"/>
+          </a:xfrm>
+          <a:prstGeom prst="rect">
+            <a:avLst/>
+          </a:prstGeom>
+          <a:noFill/>
+        </p:spPr>
+        <p:txBody>
+          <a:bodyPr wrap="square">
+            <a:spAutoFit/>
+          </a:bodyPr>
+          <a:lstStyle/>
+          <a:p>
+            <a:pPr>
+              <a:spcBef>
+                <a:spcPts val="400"/>
+              </a:spcBef>
+            </a:pPr>
+            <a:r>
+              <a:rPr sz="1300" b="0" i="1">
+                <a:solidFill>
+                  <a:srgbClr val="1B4F8A"/>
+                </a:solidFill>
+                <a:latin typeface="Segoe UI"/>
+              </a:rPr>
+              <a:t>github.com/Nirrmam2211/finguard-ai</a:t>
+            </a:r>
+          </a:p>
+          <a:p>
+            <a:pPr>
+              <a:spcBef>
+                <a:spcPts val="400"/>
+              </a:spcBef>
+            </a:pPr>
+            <a:r>
+              <a:rPr sz="1300" b="0" i="1">
+                <a:solidFill>
+                  <a:srgbClr val="1B4F8A"/>
+                </a:solidFill>
+                <a:latin typeface="Segoe UI"/>
+              </a:rPr>
+              <a:t>500 transactions  |  17 unit tests  |  100% Critic pass rate</a:t>
+            </a:r>
+          </a:p>
+        </p:txBody>
+      </p:sp>
+      <p:sp>
+        <p:nvSpPr>
+          <p:cNvPr id="8" name="TextBox 7"/>
+          <p:cNvSpPr txBox="1"/>
+          <p:nvPr/>
+        </p:nvSpPr>
+        <p:spPr>
+          <a:xfrm>
+            <a:off x="914400" y="5989320"/>
+            <a:ext cx="7315200" cy="384048"/>
+          </a:xfrm>
+          <a:prstGeom prst="rect">
+            <a:avLst/>
+          </a:prstGeom>
+          <a:noFill/>
+        </p:spPr>
+        <p:txBody>
+          <a:bodyPr wrap="square">
+            <a:spAutoFit/>
+          </a:bodyPr>
+          <a:lstStyle/>
+          <a:p>
+            <a:pPr algn="ctr"/>
+            <a:r>
+              <a:rPr sz="1150" b="0" i="0">
+                <a:solidFill>
+                  <a:srgbClr val="C29A3C"/>
+                </a:solidFill>
+                <a:latin typeface="Segoe UI"/>
+              </a:rPr>
+              <a:t>Symbiosis Institute of Technology  /  SEM-5 Flexi  /  2026</a:t>
+            </a:r>
+          </a:p>
+        </p:txBody>
+      </p:sp>
+      <p:sp>
+        <p:nvSpPr>
+          <p:cNvPr id="9" name="TextBox 8"/>
+          <p:cNvSpPr txBox="1"/>
+          <p:nvPr/>
+        </p:nvSpPr>
+        <p:spPr>
+          <a:xfrm>
+            <a:off x="228600" y="201168"/>
+            <a:ext cx="274320" cy="274320"/>
+          </a:xfrm>
+          <a:prstGeom prst="rect">
+            <a:avLst/>
+          </a:prstGeom>
+          <a:noFill/>
+        </p:spPr>
+        <p:txBody>
+          <a:bodyPr wrap="square">
+            <a:spAutoFit/>
+          </a:bodyPr>
+          <a:lstStyle/>
+          <a:p>
+            <a:pPr algn="ctr"/>
+            <a:r>
+              <a:rPr sz="1400" b="0" i="0">
+                <a:solidFill>
+                  <a:srgbClr val="C29A3C"/>
+                </a:solidFill>
+                <a:latin typeface="Segoe UI"/>
+              </a:rPr>
+              <a:t>+</a:t>
+            </a:r>
+          </a:p>
+        </p:txBody>
+      </p:sp>
+      <p:sp>
+        <p:nvSpPr>
+          <p:cNvPr id="10" name="TextBox 9"/>
+          <p:cNvSpPr txBox="1"/>
+          <p:nvPr/>
+        </p:nvSpPr>
+        <p:spPr>
+          <a:xfrm>
+            <a:off x="8503920" y="201168"/>
+            <a:ext cx="274320" cy="274320"/>
+          </a:xfrm>
+          <a:prstGeom prst="rect">
+            <a:avLst/>
+          </a:prstGeom>
+          <a:noFill/>
+        </p:spPr>
+        <p:txBody>
+          <a:bodyPr wrap="square">
+            <a:spAutoFit/>
+          </a:bodyPr>
+          <a:lstStyle/>
+          <a:p>
+            <a:pPr algn="ctr"/>
+            <a:r>
+              <a:rPr sz="1400" b="0" i="0">
+                <a:solidFill>
+                  <a:srgbClr val="C29A3C"/>
+                </a:solidFill>
+                <a:latin typeface="Segoe UI"/>
+              </a:rPr>
+              <a:t>+</a:t>
+            </a:r>
+          </a:p>
+        </p:txBody>
+      </p:sp>
+      <p:sp>
+        <p:nvSpPr>
+          <p:cNvPr id="11" name="TextBox 10"/>
+          <p:cNvSpPr txBox="1"/>
+          <p:nvPr/>
+        </p:nvSpPr>
+        <p:spPr>
+          <a:xfrm>
+            <a:off x="228600" y="6446520"/>
+            <a:ext cx="274320" cy="274320"/>
+          </a:xfrm>
+          <a:prstGeom prst="rect">
+            <a:avLst/>
+          </a:prstGeom>
+          <a:noFill/>
+        </p:spPr>
+        <p:txBody>
+          <a:bodyPr wrap="square">
+            <a:spAutoFit/>
+          </a:bodyPr>
+          <a:lstStyle/>
+          <a:p>
+            <a:pPr algn="ctr"/>
+            <a:r>
+              <a:rPr sz="1400" b="0" i="0">
+                <a:solidFill>
+                  <a:srgbClr val="C29A3C"/>
+                </a:solidFill>
+                <a:latin typeface="Segoe UI"/>
+              </a:rPr>
+              <a:t>+</a:t>
+            </a:r>
+          </a:p>
+        </p:txBody>
+      </p:sp>
+      <p:sp>
+        <p:nvSpPr>
+          <p:cNvPr id="12" name="TextBox 11"/>
+          <p:cNvSpPr txBox="1"/>
+          <p:nvPr/>
+        </p:nvSpPr>
+        <p:spPr>
+          <a:xfrm>
+            <a:off x="8503920" y="6446520"/>
+            <a:ext cx="274320" cy="274320"/>
+          </a:xfrm>
+          <a:prstGeom prst="rect">
+            <a:avLst/>
+          </a:prstGeom>
+          <a:noFill/>
+        </p:spPr>
+        <p:txBody>
+          <a:bodyPr wrap="square">
+            <a:spAutoFit/>
+          </a:bodyPr>
+          <a:lstStyle/>
+          <a:p>
+            <a:pPr algn="ctr"/>
+            <a:r>
+              <a:rPr sz="1400" b="0" i="0">
+                <a:solidFill>
+                  <a:srgbClr val="C29A3C"/>
+                </a:solidFill>
+                <a:latin typeface="Segoe UI"/>
+              </a:rPr>
+              <a:t>+</a:t>
             </a:r>
           </a:p>
         </p:txBody>
